--- a/RMSTU_Election_Presentation.pptx
+++ b/RMSTU_Election_Presentation.pptx
@@ -17,6 +17,8 @@
     <p:sldId id="265" r:id="rId16"/>
     <p:sldId id="266" r:id="rId17"/>
     <p:sldId id="267" r:id="rId18"/>
+    <p:sldId id="268" r:id="rId19"/>
+    <p:sldId id="269" r:id="rId20"/>
   </p:sldIdLst>
   <p:sldSz cx="12191695" cy="6858000" type="screen4x3"/>
   <p:notesSz cx="6858000" cy="9144000"/>
@@ -3095,7 +3097,7 @@
     <p:bg>
       <p:bgPr>
         <a:solidFill>
-          <a:srgbClr val="0F0F0F"/>
+          <a:srgbClr val="16162E"/>
         </a:solidFill>
         <a:effectLst/>
       </p:bgPr>
@@ -3116,7 +3118,7 @@
         <p:spPr>
           <a:xfrm>
             <a:off x="0" y="0"/>
-            <a:ext cx="12191695" cy="137160"/>
+            <a:ext cx="12191695" cy="164592"/>
           </a:xfrm>
           <a:prstGeom prst="roundRect">
             <a:avLst/>
@@ -3152,86 +3154,14 @@
       </p:sp>
       <p:sp>
         <p:nvSpPr>
-          <p:cNvPr id="3" name="TextBox 2"/>
-          <p:cNvSpPr txBox="1"/>
-          <p:nvPr/>
-        </p:nvSpPr>
-        <p:spPr>
-          <a:xfrm>
-            <a:off x="914400" y="1371600"/>
-            <a:ext cx="10058400" cy="1097280"/>
-          </a:xfrm>
-          <a:prstGeom prst="rect">
-            <a:avLst/>
-          </a:prstGeom>
-          <a:noFill/>
-        </p:spPr>
-        <p:txBody>
-          <a:bodyPr wrap="square">
-            <a:spAutoFit/>
-          </a:bodyPr>
-          <a:lstStyle/>
-          <a:p>
-            <a:pPr algn="ctr">
-              <a:defRPr sz="4800" b="1">
-                <a:solidFill>
-                  <a:srgbClr val="FFFFFF"/>
-                </a:solidFill>
-                <a:latin typeface="Calibri"/>
-              </a:defRPr>
-            </a:pPr>
-            <a:r>
-              <a:t>RMSTU DIGITAL ELECTION HUB</a:t>
-            </a:r>
-          </a:p>
-        </p:txBody>
-      </p:sp>
-      <p:sp>
-        <p:nvSpPr>
-          <p:cNvPr id="4" name="TextBox 3"/>
-          <p:cNvSpPr txBox="1"/>
-          <p:nvPr/>
-        </p:nvSpPr>
-        <p:spPr>
-          <a:xfrm>
-            <a:off x="914400" y="2560320"/>
-            <a:ext cx="10058400" cy="731520"/>
-          </a:xfrm>
-          <a:prstGeom prst="rect">
-            <a:avLst/>
-          </a:prstGeom>
-          <a:noFill/>
-        </p:spPr>
-        <p:txBody>
-          <a:bodyPr wrap="square">
-            <a:spAutoFit/>
-          </a:bodyPr>
-          <a:lstStyle/>
-          <a:p>
-            <a:pPr algn="ctr">
-              <a:defRPr sz="2400" b="0">
-                <a:solidFill>
-                  <a:srgbClr val="F97316"/>
-                </a:solidFill>
-                <a:latin typeface="Calibri"/>
-              </a:defRPr>
-            </a:pPr>
-            <a:r>
-              <a:t>A Secure &amp; Transparent Online Voting Platform</a:t>
-            </a:r>
-          </a:p>
-        </p:txBody>
-      </p:sp>
-      <p:sp>
-        <p:nvSpPr>
-          <p:cNvPr id="5" name="Rounded Rectangle 4"/>
+          <p:cNvPr id="3" name="Rounded Rectangle 2"/>
           <p:cNvSpPr/>
           <p:nvPr/>
         </p:nvSpPr>
         <p:spPr>
           <a:xfrm>
-            <a:off x="4572000" y="3474720"/>
-            <a:ext cx="3047695" cy="54864"/>
+            <a:off x="0" y="6693408"/>
+            <a:ext cx="12191695" cy="164592"/>
           </a:xfrm>
           <a:prstGeom prst="roundRect">
             <a:avLst/>
@@ -3267,14 +3197,14 @@
       </p:sp>
       <p:sp>
         <p:nvSpPr>
-          <p:cNvPr id="6" name="TextBox 5"/>
+          <p:cNvPr id="4" name="TextBox 3"/>
           <p:cNvSpPr txBox="1"/>
           <p:nvPr/>
         </p:nvSpPr>
         <p:spPr>
           <a:xfrm>
-            <a:off x="914400" y="4114800"/>
-            <a:ext cx="10058400" cy="457200"/>
+            <a:off x="914400" y="1097280"/>
+            <a:ext cx="10058400" cy="1280160"/>
           </a:xfrm>
           <a:prstGeom prst="rect">
             <a:avLst/>
@@ -3288,29 +3218,29 @@
           <a:lstStyle/>
           <a:p>
             <a:pPr algn="ctr">
-              <a:defRPr sz="1800" b="0">
-                <a:solidFill>
-                  <a:srgbClr val="CCCCCC"/>
-                </a:solidFill>
-                <a:latin typeface="Calibri"/>
-              </a:defRPr>
-            </a:pPr>
-            <a:r>
-              <a:t>Course: Java Programming</a:t>
-            </a:r>
-          </a:p>
-        </p:txBody>
-      </p:sp>
-      <p:sp>
-        <p:nvSpPr>
-          <p:cNvPr id="7" name="TextBox 6"/>
+              <a:defRPr sz="5000" b="1">
+                <a:solidFill>
+                  <a:srgbClr val="FFFFFF"/>
+                </a:solidFill>
+                <a:latin typeface="Calibri"/>
+              </a:defRPr>
+            </a:pPr>
+            <a:r>
+              <a:t>RMSTU DIGITAL ELECTION HUB</a:t>
+            </a:r>
+          </a:p>
+        </p:txBody>
+      </p:sp>
+      <p:sp>
+        <p:nvSpPr>
+          <p:cNvPr id="5" name="TextBox 4"/>
           <p:cNvSpPr txBox="1"/>
           <p:nvPr/>
         </p:nvSpPr>
         <p:spPr>
           <a:xfrm>
-            <a:off x="914400" y="4572000"/>
-            <a:ext cx="10058400" cy="457200"/>
+            <a:off x="914400" y="2468880"/>
+            <a:ext cx="10058400" cy="640080"/>
           </a:xfrm>
           <a:prstGeom prst="rect">
             <a:avLst/>
@@ -3324,6 +3254,121 @@
           <a:lstStyle/>
           <a:p>
             <a:pPr algn="ctr">
+              <a:defRPr sz="2600" b="0">
+                <a:solidFill>
+                  <a:srgbClr val="F97316"/>
+                </a:solidFill>
+                <a:latin typeface="Calibri"/>
+              </a:defRPr>
+            </a:pPr>
+            <a:r>
+              <a:t>A Secure &amp; Transparent Online Voting Platform</a:t>
+            </a:r>
+          </a:p>
+        </p:txBody>
+      </p:sp>
+      <p:sp>
+        <p:nvSpPr>
+          <p:cNvPr id="6" name="Rounded Rectangle 5"/>
+          <p:cNvSpPr/>
+          <p:nvPr/>
+        </p:nvSpPr>
+        <p:spPr>
+          <a:xfrm>
+            <a:off x="4754880" y="3291840"/>
+            <a:ext cx="2743200" cy="45720"/>
+          </a:xfrm>
+          <a:prstGeom prst="roundRect">
+            <a:avLst/>
+          </a:prstGeom>
+          <a:solidFill>
+            <a:srgbClr val="F97316"/>
+          </a:solidFill>
+          <a:ln>
+            <a:noFill/>
+          </a:ln>
+        </p:spPr>
+        <p:style>
+          <a:lnRef idx="1">
+            <a:schemeClr val="accent1"/>
+          </a:lnRef>
+          <a:fillRef idx="3">
+            <a:schemeClr val="accent1"/>
+          </a:fillRef>
+          <a:effectRef idx="2">
+            <a:schemeClr val="accent1"/>
+          </a:effectRef>
+          <a:fontRef idx="minor">
+            <a:schemeClr val="lt1"/>
+          </a:fontRef>
+        </p:style>
+        <p:txBody>
+          <a:bodyPr rtlCol="0" anchor="ctr"/>
+          <a:lstStyle/>
+          <a:p>
+            <a:pPr algn="ctr"/>
+          </a:p>
+        </p:txBody>
+      </p:sp>
+      <p:sp>
+        <p:nvSpPr>
+          <p:cNvPr id="7" name="TextBox 6"/>
+          <p:cNvSpPr txBox="1"/>
+          <p:nvPr/>
+        </p:nvSpPr>
+        <p:spPr>
+          <a:xfrm>
+            <a:off x="914400" y="3840480"/>
+            <a:ext cx="10058400" cy="457200"/>
+          </a:xfrm>
+          <a:prstGeom prst="rect">
+            <a:avLst/>
+          </a:prstGeom>
+          <a:noFill/>
+        </p:spPr>
+        <p:txBody>
+          <a:bodyPr wrap="square">
+            <a:spAutoFit/>
+          </a:bodyPr>
+          <a:lstStyle/>
+          <a:p>
+            <a:pPr algn="ctr">
+              <a:defRPr sz="1800" b="0">
+                <a:solidFill>
+                  <a:srgbClr val="DDDDDD"/>
+                </a:solidFill>
+                <a:latin typeface="Calibri"/>
+              </a:defRPr>
+            </a:pPr>
+            <a:r>
+              <a:t>Course: Java Programming  |  Rangamati MST University</a:t>
+            </a:r>
+          </a:p>
+        </p:txBody>
+      </p:sp>
+      <p:sp>
+        <p:nvSpPr>
+          <p:cNvPr id="8" name="TextBox 7"/>
+          <p:cNvSpPr txBox="1"/>
+          <p:nvPr/>
+        </p:nvSpPr>
+        <p:spPr>
+          <a:xfrm>
+            <a:off x="914400" y="5029200"/>
+            <a:ext cx="10058400" cy="1828800"/>
+          </a:xfrm>
+          <a:prstGeom prst="rect">
+            <a:avLst/>
+          </a:prstGeom>
+          <a:noFill/>
+        </p:spPr>
+        <p:txBody>
+          <a:bodyPr wrap="square">
+            <a:spAutoFit/>
+          </a:bodyPr>
+          <a:lstStyle/>
+          <a:p>
+            <a:pPr algn="ctr">
               <a:defRPr sz="1600" b="0">
                 <a:solidFill>
                   <a:srgbClr val="888888"/>
@@ -3332,7 +3377,7 @@
               </a:defRPr>
             </a:pPr>
             <a:r>
-              <a:t>Rangamati MST University</a:t>
+              <a:t>Developed by: Md. Nayeem Uddin Peyal</a:t>
             </a:r>
           </a:p>
         </p:txBody>
@@ -3378,7 +3423,7 @@
             <a:avLst/>
           </a:prstGeom>
           <a:solidFill>
-            <a:srgbClr val="FFD700"/>
+            <a:srgbClr val="06B6D4"/>
           </a:solidFill>
           <a:ln>
             <a:noFill/>
@@ -3414,7 +3459,7 @@
         </p:nvSpPr>
         <p:spPr>
           <a:xfrm>
-            <a:off x="731520" y="457200"/>
+            <a:off x="731520" y="365760"/>
             <a:ext cx="10058400" cy="731520"/>
           </a:xfrm>
           <a:prstGeom prst="rect">
@@ -3437,7 +3482,7 @@
               </a:defRPr>
             </a:pPr>
             <a:r>
-              <a:t>OOP CONCEPTS DEMONSTRATED</a:t>
+              <a:t>DATABASE DESIGN — FIRESTORE (NoSQL)</a:t>
             </a:r>
           </a:p>
         </p:txBody>
@@ -3450,14 +3495,14 @@
         </p:nvSpPr>
         <p:spPr>
           <a:xfrm>
-            <a:off x="731520" y="1188720"/>
+            <a:off x="731520" y="1051560"/>
             <a:ext cx="1828800" cy="36576"/>
           </a:xfrm>
           <a:prstGeom prst="roundRect">
             <a:avLst/>
           </a:prstGeom>
           <a:solidFill>
-            <a:srgbClr val="FFD700"/>
+            <a:srgbClr val="06B6D4"/>
           </a:solidFill>
           <a:ln>
             <a:noFill/>
@@ -3493,7 +3538,7 @@
         </p:nvSpPr>
         <p:spPr>
           <a:xfrm>
-            <a:off x="731520" y="1645920"/>
+            <a:off x="731520" y="1463040"/>
             <a:ext cx="10058400" cy="5029200"/>
           </a:xfrm>
           <a:prstGeom prst="rect">
@@ -3509,56 +3554,59 @@
           <a:p>
             <a:pPr>
               <a:spcAft>
-                <a:spcPts val="600"/>
+                <a:spcPts val="500"/>
               </a:spcAft>
               <a:defRPr sz="1700">
                 <a:solidFill>
-                  <a:srgbClr val="CCCCCC"/>
-                </a:solidFill>
-                <a:latin typeface="Calibri"/>
-              </a:defRPr>
-            </a:pPr>
-            <a:r>
-              <a:t>  Encapsulation: Private fields with public getters/setters</a:t>
+                  <a:srgbClr val="DDDDDD"/>
+                </a:solidFill>
+                <a:latin typeface="Calibri"/>
+              </a:defRPr>
+            </a:pPr>
+            <a:r>
+              <a:t>  Collection: users/</a:t>
             </a:r>
           </a:p>
           <a:p>
             <a:pPr>
               <a:spcAft>
-                <a:spcPts val="600"/>
+                <a:spcPts val="500"/>
               </a:spcAft>
               <a:defRPr sz="1700">
                 <a:solidFill>
-                  <a:srgbClr val="CCCCCC"/>
-                </a:solidFill>
-                <a:latin typeface="Calibri"/>
-              </a:defRPr>
-            </a:pPr>
+                  <a:srgbClr val="DDDDDD"/>
+                </a:solidFill>
+                <a:latin typeface="Calibri"/>
+              </a:defRPr>
+            </a:pPr>
+            <a:r>
+              <a:t>   Document: {id, name, password, role, hasVoted}</a:t>
+            </a:r>
           </a:p>
           <a:p>
             <a:pPr>
               <a:spcAft>
-                <a:spcPts val="600"/>
+                <a:spcPts val="500"/>
               </a:spcAft>
               <a:defRPr sz="1700">
                 <a:solidFill>
-                  <a:srgbClr val="CCCCCC"/>
-                </a:solidFill>
-                <a:latin typeface="Calibri"/>
-              </a:defRPr>
-            </a:pPr>
-            <a:r>
-              <a:t>  Polymorphism: Enum types, method overloading</a:t>
+                  <a:srgbClr val="DDDDDD"/>
+                </a:solidFill>
+                <a:latin typeface="Calibri"/>
+              </a:defRPr>
+            </a:pPr>
+            <a:r>
+              <a:t>   Example: voter1 {name: "Sample Voter", role: "VOTER"}</a:t>
             </a:r>
           </a:p>
           <a:p>
             <a:pPr>
               <a:spcAft>
-                <a:spcPts val="600"/>
+                <a:spcPts val="500"/>
               </a:spcAft>
               <a:defRPr sz="1700">
                 <a:solidFill>
-                  <a:srgbClr val="CCCCCC"/>
+                  <a:srgbClr val="DDDDDD"/>
                 </a:solidFill>
                 <a:latin typeface="Calibri"/>
               </a:defRPr>
@@ -3567,56 +3615,59 @@
           <a:p>
             <a:pPr>
               <a:spcAft>
-                <a:spcPts val="600"/>
+                <a:spcPts val="500"/>
               </a:spcAft>
               <a:defRPr sz="1700">
                 <a:solidFill>
-                  <a:srgbClr val="CCCCCC"/>
-                </a:solidFill>
-                <a:latin typeface="Calibri"/>
-              </a:defRPr>
-            </a:pPr>
-            <a:r>
-              <a:t>  Abstraction: ElectionManager hides complexity from Main</a:t>
+                  <a:srgbClr val="DDDDDD"/>
+                </a:solidFill>
+                <a:latin typeface="Calibri"/>
+              </a:defRPr>
+            </a:pPr>
+            <a:r>
+              <a:t>  Collection: candidates/</a:t>
             </a:r>
           </a:p>
           <a:p>
             <a:pPr>
               <a:spcAft>
-                <a:spcPts val="600"/>
+                <a:spcPts val="500"/>
               </a:spcAft>
               <a:defRPr sz="1700">
                 <a:solidFill>
-                  <a:srgbClr val="CCCCCC"/>
-                </a:solidFill>
-                <a:latin typeface="Calibri"/>
-              </a:defRPr>
-            </a:pPr>
+                  <a:srgbClr val="DDDDDD"/>
+                </a:solidFill>
+                <a:latin typeface="Calibri"/>
+              </a:defRPr>
+            </a:pPr>
+            <a:r>
+              <a:t>   Document: {id, userId, name, posts[], status, votes, manifesto}</a:t>
+            </a:r>
           </a:p>
           <a:p>
             <a:pPr>
               <a:spcAft>
-                <a:spcPts val="600"/>
+                <a:spcPts val="500"/>
               </a:spcAft>
               <a:defRPr sz="1700">
                 <a:solidFill>
-                  <a:srgbClr val="CCCCCC"/>
-                </a:solidFill>
-                <a:latin typeface="Calibri"/>
-              </a:defRPr>
-            </a:pPr>
-            <a:r>
-              <a:t>  Collections: HashMap, ArrayList, Stream API</a:t>
+                  <a:srgbClr val="DDDDDD"/>
+                </a:solidFill>
+                <a:latin typeface="Calibri"/>
+              </a:defRPr>
+            </a:pPr>
+            <a:r>
+              <a:t>   Example: cand_01 {name: "Alice", posts: ["President"], votes: 42}</a:t>
             </a:r>
           </a:p>
           <a:p>
             <a:pPr>
               <a:spcAft>
-                <a:spcPts val="600"/>
+                <a:spcPts val="500"/>
               </a:spcAft>
               <a:defRPr sz="1700">
                 <a:solidFill>
-                  <a:srgbClr val="CCCCCC"/>
+                  <a:srgbClr val="DDDDDD"/>
                 </a:solidFill>
                 <a:latin typeface="Calibri"/>
               </a:defRPr>
@@ -3625,75 +3676,78 @@
           <a:p>
             <a:pPr>
               <a:spcAft>
-                <a:spcPts val="600"/>
+                <a:spcPts val="500"/>
               </a:spcAft>
               <a:defRPr sz="1700">
                 <a:solidFill>
-                  <a:srgbClr val="CCCCCC"/>
-                </a:solidFill>
-                <a:latin typeface="Calibri"/>
-              </a:defRPr>
-            </a:pPr>
-            <a:r>
-              <a:t>  Java I/O: Scanner for input, printf for formatted output</a:t>
+                  <a:srgbClr val="DDDDDD"/>
+                </a:solidFill>
+                <a:latin typeface="Calibri"/>
+              </a:defRPr>
+            </a:pPr>
+            <a:r>
+              <a:t>  Collection: config/election (single doc)</a:t>
             </a:r>
           </a:p>
           <a:p>
             <a:pPr>
               <a:spcAft>
-                <a:spcPts val="600"/>
+                <a:spcPts val="500"/>
               </a:spcAft>
               <a:defRPr sz="1700">
                 <a:solidFill>
-                  <a:srgbClr val="CCCCCC"/>
-                </a:solidFill>
-                <a:latin typeface="Calibri"/>
-              </a:defRPr>
-            </a:pPr>
+                  <a:srgbClr val="DDDDDD"/>
+                </a:solidFill>
+                <a:latin typeface="Calibri"/>
+              </a:defRPr>
+            </a:pPr>
+            <a:r>
+              <a:t>   Document: {status, date, duration, officialWinner, availablePosts[]}</a:t>
+            </a:r>
           </a:p>
           <a:p>
             <a:pPr>
               <a:spcAft>
-                <a:spcPts val="600"/>
+                <a:spcPts val="500"/>
               </a:spcAft>
               <a:defRPr sz="1700">
                 <a:solidFill>
-                  <a:srgbClr val="CCCCCC"/>
-                </a:solidFill>
-                <a:latin typeface="Calibri"/>
-              </a:defRPr>
-            </a:pPr>
-            <a:r>
-              <a:t>  Lambda &amp; Streams: filter(), map(), sorted(), collect()</a:t>
-            </a:r>
+                  <a:srgbClr val="DDDDDD"/>
+                </a:solidFill>
+                <a:latin typeface="Calibri"/>
+              </a:defRPr>
+            </a:pPr>
           </a:p>
           <a:p>
             <a:pPr>
               <a:spcAft>
-                <a:spcPts val="600"/>
+                <a:spcPts val="500"/>
               </a:spcAft>
               <a:defRPr sz="1700">
                 <a:solidFill>
-                  <a:srgbClr val="CCCCCC"/>
-                </a:solidFill>
-                <a:latin typeface="Calibri"/>
-              </a:defRPr>
-            </a:pPr>
+                  <a:srgbClr val="DDDDDD"/>
+                </a:solidFill>
+                <a:latin typeface="Calibri"/>
+              </a:defRPr>
+            </a:pPr>
+            <a:r>
+              <a:t>  Security: Read public | Write validated by role &amp; field rules</a:t>
+            </a:r>
           </a:p>
           <a:p>
             <a:pPr>
               <a:spcAft>
-                <a:spcPts val="600"/>
+                <a:spcPts val="500"/>
               </a:spcAft>
               <a:defRPr sz="1700">
                 <a:solidFill>
-                  <a:srgbClr val="CCCCCC"/>
-                </a:solidFill>
-                <a:latin typeface="Calibri"/>
-              </a:defRPr>
-            </a:pPr>
-            <a:r>
-              <a:t>  Exception Handling: Null checks, Optional for safety</a:t>
+                  <a:srgbClr val="DDDDDD"/>
+                </a:solidFill>
+                <a:latin typeface="Calibri"/>
+              </a:defRPr>
+            </a:pPr>
+            <a:r>
+              <a:t>  Real-time: onSnapshot() listeners for live vote updates</a:t>
             </a:r>
           </a:p>
         </p:txBody>
@@ -3739,7 +3793,7 @@
             <a:avLst/>
           </a:prstGeom>
           <a:solidFill>
-            <a:srgbClr val="06B6D4"/>
+            <a:srgbClr val="22C55E"/>
           </a:solidFill>
           <a:ln>
             <a:noFill/>
@@ -3775,7 +3829,7 @@
         </p:nvSpPr>
         <p:spPr>
           <a:xfrm>
-            <a:off x="731520" y="457200"/>
+            <a:off x="731520" y="365760"/>
             <a:ext cx="10058400" cy="731520"/>
           </a:xfrm>
           <a:prstGeom prst="rect">
@@ -3798,7 +3852,7 @@
               </a:defRPr>
             </a:pPr>
             <a:r>
-              <a:t>FUTURE ENHANCEMENTS</a:t>
+              <a:t>KEY FEATURES</a:t>
             </a:r>
           </a:p>
         </p:txBody>
@@ -3811,8 +3865,94 @@
         </p:nvSpPr>
         <p:spPr>
           <a:xfrm>
-            <a:off x="731520" y="1188720"/>
+            <a:off x="731520" y="1051560"/>
             <a:ext cx="1828800" cy="36576"/>
+          </a:xfrm>
+          <a:prstGeom prst="roundRect">
+            <a:avLst/>
+          </a:prstGeom>
+          <a:solidFill>
+            <a:srgbClr val="22C55E"/>
+          </a:solidFill>
+          <a:ln>
+            <a:noFill/>
+          </a:ln>
+        </p:spPr>
+        <p:style>
+          <a:lnRef idx="1">
+            <a:schemeClr val="accent1"/>
+          </a:lnRef>
+          <a:fillRef idx="3">
+            <a:schemeClr val="accent1"/>
+          </a:fillRef>
+          <a:effectRef idx="2">
+            <a:schemeClr val="accent1"/>
+          </a:effectRef>
+          <a:fontRef idx="minor">
+            <a:schemeClr val="lt1"/>
+          </a:fontRef>
+        </p:style>
+        <p:txBody>
+          <a:bodyPr rtlCol="0" anchor="ctr"/>
+          <a:lstStyle/>
+          <a:p>
+            <a:pPr algn="ctr"/>
+          </a:p>
+        </p:txBody>
+      </p:sp>
+      <p:sp>
+        <p:nvSpPr>
+          <p:cNvPr id="5" name="Rounded Rectangle 4"/>
+          <p:cNvSpPr/>
+          <p:nvPr/>
+        </p:nvSpPr>
+        <p:spPr>
+          <a:xfrm>
+            <a:off x="731520" y="1463040"/>
+            <a:ext cx="5303520" cy="4846320"/>
+          </a:xfrm>
+          <a:prstGeom prst="roundRect">
+            <a:avLst/>
+          </a:prstGeom>
+          <a:solidFill>
+            <a:srgbClr val="1E1E3A"/>
+          </a:solidFill>
+          <a:ln>
+            <a:noFill/>
+          </a:ln>
+        </p:spPr>
+        <p:style>
+          <a:lnRef idx="1">
+            <a:schemeClr val="accent1"/>
+          </a:lnRef>
+          <a:fillRef idx="3">
+            <a:schemeClr val="accent1"/>
+          </a:fillRef>
+          <a:effectRef idx="2">
+            <a:schemeClr val="accent1"/>
+          </a:effectRef>
+          <a:fontRef idx="minor">
+            <a:schemeClr val="lt1"/>
+          </a:fontRef>
+        </p:style>
+        <p:txBody>
+          <a:bodyPr rtlCol="0" anchor="ctr"/>
+          <a:lstStyle/>
+          <a:p>
+            <a:pPr algn="ctr"/>
+          </a:p>
+        </p:txBody>
+      </p:sp>
+      <p:sp>
+        <p:nvSpPr>
+          <p:cNvPr id="6" name="Rounded Rectangle 5"/>
+          <p:cNvSpPr/>
+          <p:nvPr/>
+        </p:nvSpPr>
+        <p:spPr>
+          <a:xfrm>
+            <a:off x="731520" y="1463040"/>
+            <a:ext cx="5303520" cy="50800"/>
           </a:xfrm>
           <a:prstGeom prst="roundRect">
             <a:avLst/>
@@ -3848,14 +3988,14 @@
       </p:sp>
       <p:sp>
         <p:nvSpPr>
-          <p:cNvPr id="5" name="TextBox 4"/>
+          <p:cNvPr id="7" name="TextBox 6"/>
           <p:cNvSpPr txBox="1"/>
           <p:nvPr/>
         </p:nvSpPr>
         <p:spPr>
           <a:xfrm>
-            <a:off x="731520" y="1645920"/>
-            <a:ext cx="10058400" cy="5029200"/>
+            <a:off x="1005840" y="1691640"/>
+            <a:ext cx="4754880" cy="365760"/>
           </a:xfrm>
           <a:prstGeom prst="rect">
             <a:avLst/>
@@ -3868,131 +4008,242 @@
           </a:bodyPr>
           <a:lstStyle/>
           <a:p>
-            <a:pPr>
-              <a:spcAft>
-                <a:spcPts val="600"/>
-              </a:spcAft>
-              <a:defRPr sz="1700">
-                <a:solidFill>
-                  <a:srgbClr val="CCCCCC"/>
-                </a:solidFill>
-                <a:latin typeface="Calibri"/>
-              </a:defRPr>
-            </a:pPr>
-            <a:r>
-              <a:t>  OTP-based voter verification via SMS/Email</a:t>
-            </a:r>
-          </a:p>
-          <a:p>
-            <a:pPr>
-              <a:spcAft>
-                <a:spcPts val="600"/>
-              </a:spcAft>
-              <a:defRPr sz="1700">
-                <a:solidFill>
-                  <a:srgbClr val="CCCCCC"/>
-                </a:solidFill>
-                <a:latin typeface="Calibri"/>
-              </a:defRPr>
-            </a:pPr>
-            <a:r>
-              <a:t>  Blockchain-based vote storage for tamper-proof records</a:t>
-            </a:r>
-          </a:p>
-          <a:p>
-            <a:pPr>
-              <a:spcAft>
-                <a:spcPts val="600"/>
-              </a:spcAft>
-              <a:defRPr sz="1700">
-                <a:solidFill>
-                  <a:srgbClr val="CCCCCC"/>
-                </a:solidFill>
-                <a:latin typeface="Calibri"/>
-              </a:defRPr>
-            </a:pPr>
-            <a:r>
-              <a:t>  Voter turnout analytics dashboard with charts</a:t>
-            </a:r>
-          </a:p>
-          <a:p>
-            <a:pPr>
-              <a:spcAft>
-                <a:spcPts val="600"/>
-              </a:spcAft>
-              <a:defRPr sz="1700">
-                <a:solidFill>
-                  <a:srgbClr val="CCCCCC"/>
-                </a:solidFill>
-                <a:latin typeface="Calibri"/>
-              </a:defRPr>
-            </a:pPr>
-            <a:r>
-              <a:t>  Multi-language support (Bengali + English)</a:t>
-            </a:r>
-          </a:p>
-          <a:p>
-            <a:pPr>
-              <a:spcAft>
-                <a:spcPts val="600"/>
-              </a:spcAft>
-              <a:defRPr sz="1700">
-                <a:solidFill>
-                  <a:srgbClr val="CCCCCC"/>
-                </a:solidFill>
-                <a:latin typeface="Calibri"/>
-              </a:defRPr>
-            </a:pPr>
-            <a:r>
-              <a:t>  Mobile App (Android/iOS) using Flutter</a:t>
-            </a:r>
-          </a:p>
-          <a:p>
-            <a:pPr>
-              <a:spcAft>
-                <a:spcPts val="600"/>
-              </a:spcAft>
-              <a:defRPr sz="1700">
-                <a:solidFill>
-                  <a:srgbClr val="CCCCCC"/>
-                </a:solidFill>
-                <a:latin typeface="Calibri"/>
-              </a:defRPr>
-            </a:pPr>
-            <a:r>
-              <a:t>  Fingerprint/biometric authentication</a:t>
-            </a:r>
-          </a:p>
-          <a:p>
-            <a:pPr>
-              <a:spcAft>
-                <a:spcPts val="600"/>
-              </a:spcAft>
-              <a:defRPr sz="1700">
-                <a:solidFill>
-                  <a:srgbClr val="CCCCCC"/>
-                </a:solidFill>
-                <a:latin typeface="Calibri"/>
-              </a:defRPr>
-            </a:pPr>
-            <a:r>
-              <a:t>  Export results as PDF/Excel for official records</a:t>
-            </a:r>
-          </a:p>
-          <a:p>
-            <a:pPr>
-              <a:spcAft>
-                <a:spcPts val="600"/>
-              </a:spcAft>
-              <a:defRPr sz="1700">
-                <a:solidFill>
-                  <a:srgbClr val="CCCCCC"/>
-                </a:solidFill>
-                <a:latin typeface="Calibri"/>
-              </a:defRPr>
-            </a:pPr>
-            <a:r>
-              <a:t>  Java Spring Boot REST API backend</a:t>
+            <a:pPr algn="l">
+              <a:defRPr sz="1600" b="1">
+                <a:solidFill>
+                  <a:srgbClr val="06B6D4"/>
+                </a:solidFill>
+                <a:latin typeface="Calibri"/>
+              </a:defRPr>
+            </a:pPr>
+            <a:r>
+              <a:t>USER FACING</a:t>
+            </a:r>
+          </a:p>
+        </p:txBody>
+      </p:sp>
+      <p:sp>
+        <p:nvSpPr>
+          <p:cNvPr id="8" name="TextBox 7"/>
+          <p:cNvSpPr txBox="1"/>
+          <p:nvPr/>
+        </p:nvSpPr>
+        <p:spPr>
+          <a:xfrm>
+            <a:off x="1005840" y="2148840"/>
+            <a:ext cx="4754880" cy="3931920"/>
+          </a:xfrm>
+          <a:prstGeom prst="rect">
+            <a:avLst/>
+          </a:prstGeom>
+          <a:noFill/>
+        </p:spPr>
+        <p:txBody>
+          <a:bodyPr wrap="square">
+            <a:spAutoFit/>
+          </a:bodyPr>
+          <a:lstStyle/>
+          <a:p>
+            <a:pPr algn="l">
+              <a:defRPr sz="1300" b="0">
+                <a:solidFill>
+                  <a:srgbClr val="DDDDDD"/>
+                </a:solidFill>
+                <a:latin typeface="Calibri"/>
+              </a:defRPr>
+            </a:pPr>
+            <a:r>
+              <a:t>  One Student, One Vote (no duplicates)</a:t>
+            </a:r>
+            <a:br/>
+            <a:r>
+              <a:t>  Per-Post Voting (President, GS, VP)</a:t>
+            </a:r>
+            <a:br/>
+            <a:r>
+              <a:t>  Automatic Winner Declaration</a:t>
+            </a:r>
+            <a:br/>
+            <a:r>
+              <a:t>  Live Real-time Results</a:t>
+            </a:r>
+            <a:br/>
+            <a:r>
+              <a:t>  Dark / Light Theme Toggle</a:t>
+            </a:r>
+          </a:p>
+        </p:txBody>
+      </p:sp>
+      <p:sp>
+        <p:nvSpPr>
+          <p:cNvPr id="9" name="Rounded Rectangle 8"/>
+          <p:cNvSpPr/>
+          <p:nvPr/>
+        </p:nvSpPr>
+        <p:spPr>
+          <a:xfrm>
+            <a:off x="6126480" y="1463040"/>
+            <a:ext cx="5303520" cy="4846320"/>
+          </a:xfrm>
+          <a:prstGeom prst="roundRect">
+            <a:avLst/>
+          </a:prstGeom>
+          <a:solidFill>
+            <a:srgbClr val="1E1E3A"/>
+          </a:solidFill>
+          <a:ln>
+            <a:noFill/>
+          </a:ln>
+        </p:spPr>
+        <p:style>
+          <a:lnRef idx="1">
+            <a:schemeClr val="accent1"/>
+          </a:lnRef>
+          <a:fillRef idx="3">
+            <a:schemeClr val="accent1"/>
+          </a:fillRef>
+          <a:effectRef idx="2">
+            <a:schemeClr val="accent1"/>
+          </a:effectRef>
+          <a:fontRef idx="minor">
+            <a:schemeClr val="lt1"/>
+          </a:fontRef>
+        </p:style>
+        <p:txBody>
+          <a:bodyPr rtlCol="0" anchor="ctr"/>
+          <a:lstStyle/>
+          <a:p>
+            <a:pPr algn="ctr"/>
+          </a:p>
+        </p:txBody>
+      </p:sp>
+      <p:sp>
+        <p:nvSpPr>
+          <p:cNvPr id="10" name="Rounded Rectangle 9"/>
+          <p:cNvSpPr/>
+          <p:nvPr/>
+        </p:nvSpPr>
+        <p:spPr>
+          <a:xfrm>
+            <a:off x="6126480" y="1463040"/>
+            <a:ext cx="5303520" cy="50800"/>
+          </a:xfrm>
+          <a:prstGeom prst="roundRect">
+            <a:avLst/>
+          </a:prstGeom>
+          <a:solidFill>
+            <a:srgbClr val="F97316"/>
+          </a:solidFill>
+          <a:ln>
+            <a:noFill/>
+          </a:ln>
+        </p:spPr>
+        <p:style>
+          <a:lnRef idx="1">
+            <a:schemeClr val="accent1"/>
+          </a:lnRef>
+          <a:fillRef idx="3">
+            <a:schemeClr val="accent1"/>
+          </a:fillRef>
+          <a:effectRef idx="2">
+            <a:schemeClr val="accent1"/>
+          </a:effectRef>
+          <a:fontRef idx="minor">
+            <a:schemeClr val="lt1"/>
+          </a:fontRef>
+        </p:style>
+        <p:txBody>
+          <a:bodyPr rtlCol="0" anchor="ctr"/>
+          <a:lstStyle/>
+          <a:p>
+            <a:pPr algn="ctr"/>
+          </a:p>
+        </p:txBody>
+      </p:sp>
+      <p:sp>
+        <p:nvSpPr>
+          <p:cNvPr id="11" name="TextBox 10"/>
+          <p:cNvSpPr txBox="1"/>
+          <p:nvPr/>
+        </p:nvSpPr>
+        <p:spPr>
+          <a:xfrm>
+            <a:off x="6400800" y="1691640"/>
+            <a:ext cx="4754880" cy="365760"/>
+          </a:xfrm>
+          <a:prstGeom prst="rect">
+            <a:avLst/>
+          </a:prstGeom>
+          <a:noFill/>
+        </p:spPr>
+        <p:txBody>
+          <a:bodyPr wrap="square">
+            <a:spAutoFit/>
+          </a:bodyPr>
+          <a:lstStyle/>
+          <a:p>
+            <a:pPr algn="l">
+              <a:defRPr sz="1600" b="1">
+                <a:solidFill>
+                  <a:srgbClr val="F97316"/>
+                </a:solidFill>
+                <a:latin typeface="Calibri"/>
+              </a:defRPr>
+            </a:pPr>
+            <a:r>
+              <a:t>ADMIN / SECURITY</a:t>
+            </a:r>
+          </a:p>
+        </p:txBody>
+      </p:sp>
+      <p:sp>
+        <p:nvSpPr>
+          <p:cNvPr id="12" name="TextBox 11"/>
+          <p:cNvSpPr txBox="1"/>
+          <p:nvPr/>
+        </p:nvSpPr>
+        <p:spPr>
+          <a:xfrm>
+            <a:off x="6400800" y="2148840"/>
+            <a:ext cx="4754880" cy="3931920"/>
+          </a:xfrm>
+          <a:prstGeom prst="rect">
+            <a:avLst/>
+          </a:prstGeom>
+          <a:noFill/>
+        </p:spPr>
+        <p:txBody>
+          <a:bodyPr wrap="square">
+            <a:spAutoFit/>
+          </a:bodyPr>
+          <a:lstStyle/>
+          <a:p>
+            <a:pPr algn="l">
+              <a:defRPr sz="1300" b="0">
+                <a:solidFill>
+                  <a:srgbClr val="DDDDDD"/>
+                </a:solidFill>
+                <a:latin typeface="Calibri"/>
+              </a:defRPr>
+            </a:pPr>
+            <a:r>
+              <a:t>  Fully Responsive (Mobile, Tablet, Desktop)</a:t>
+            </a:r>
+            <a:br/>
+            <a:r>
+              <a:t>  Admin-Only Controls (Schedule, Approve)</a:t>
+            </a:r>
+            <a:br/>
+            <a:r>
+              <a:t>  Candidate Manifesto Submission</a:t>
+            </a:r>
+            <a:br/>
+            <a:r>
+              <a:t>  Reset All Data for New Election</a:t>
+            </a:r>
+            <a:br/>
+            <a:r>
+              <a:t>  Firebase Security Rules</a:t>
             </a:r>
           </a:p>
         </p:txBody>
@@ -4032,7 +4283,7 @@
         <p:spPr>
           <a:xfrm>
             <a:off x="0" y="0"/>
-            <a:ext cx="12191695" cy="137160"/>
+            <a:ext cx="12191695" cy="54864"/>
           </a:xfrm>
           <a:prstGeom prst="roundRect">
             <a:avLst/>
@@ -4074,8 +4325,8 @@
         </p:nvSpPr>
         <p:spPr>
           <a:xfrm>
-            <a:off x="914400" y="1645920"/>
-            <a:ext cx="10058400" cy="914400"/>
+            <a:off x="731520" y="274320"/>
+            <a:ext cx="10058400" cy="548640"/>
           </a:xfrm>
           <a:prstGeom prst="rect">
             <a:avLst/>
@@ -4088,8 +4339,8 @@
           </a:bodyPr>
           <a:lstStyle/>
           <a:p>
-            <a:pPr algn="ctr">
-              <a:defRPr sz="5200" b="1">
+            <a:pPr algn="l">
+              <a:defRPr sz="3200" b="1">
                 <a:solidFill>
                   <a:srgbClr val="FFFFFF"/>
                 </a:solidFill>
@@ -4097,7 +4348,7 @@
               </a:defRPr>
             </a:pPr>
             <a:r>
-              <a:t>THANK YOU</a:t>
+              <a:t>JAVA CONSOLE — DEMO OUTPUT</a:t>
             </a:r>
           </a:p>
         </p:txBody>
@@ -4110,8 +4361,8 @@
         </p:nvSpPr>
         <p:spPr>
           <a:xfrm>
-            <a:off x="5029200" y="2651760"/>
-            <a:ext cx="2133295" cy="54864"/>
+            <a:off x="731520" y="777240"/>
+            <a:ext cx="1828800" cy="36576"/>
           </a:xfrm>
           <a:prstGeom prst="roundRect">
             <a:avLst/>
@@ -4147,14 +4398,100 @@
       </p:sp>
       <p:sp>
         <p:nvSpPr>
-          <p:cNvPr id="5" name="TextBox 4"/>
+          <p:cNvPr id="5" name="Rounded Rectangle 4"/>
+          <p:cNvSpPr/>
+          <p:nvPr/>
+        </p:nvSpPr>
+        <p:spPr>
+          <a:xfrm>
+            <a:off x="457200" y="1005840"/>
+            <a:ext cx="11247120" cy="5486400"/>
+          </a:xfrm>
+          <a:prstGeom prst="roundRect">
+            <a:avLst/>
+          </a:prstGeom>
+          <a:solidFill>
+            <a:srgbClr val="0D0D1A"/>
+          </a:solidFill>
+          <a:ln>
+            <a:noFill/>
+          </a:ln>
+        </p:spPr>
+        <p:style>
+          <a:lnRef idx="1">
+            <a:schemeClr val="accent1"/>
+          </a:lnRef>
+          <a:fillRef idx="3">
+            <a:schemeClr val="accent1"/>
+          </a:fillRef>
+          <a:effectRef idx="2">
+            <a:schemeClr val="accent1"/>
+          </a:effectRef>
+          <a:fontRef idx="minor">
+            <a:schemeClr val="lt1"/>
+          </a:fontRef>
+        </p:style>
+        <p:txBody>
+          <a:bodyPr rtlCol="0" anchor="ctr"/>
+          <a:lstStyle/>
+          <a:p>
+            <a:pPr algn="ctr"/>
+          </a:p>
+        </p:txBody>
+      </p:sp>
+      <p:sp>
+        <p:nvSpPr>
+          <p:cNvPr id="6" name="Rounded Rectangle 5"/>
+          <p:cNvSpPr/>
+          <p:nvPr/>
+        </p:nvSpPr>
+        <p:spPr>
+          <a:xfrm>
+            <a:off x="457200" y="1005840"/>
+            <a:ext cx="2743200" cy="254000"/>
+          </a:xfrm>
+          <a:prstGeom prst="roundRect">
+            <a:avLst/>
+          </a:prstGeom>
+          <a:solidFill>
+            <a:srgbClr val="F97316"/>
+          </a:solidFill>
+          <a:ln>
+            <a:noFill/>
+          </a:ln>
+        </p:spPr>
+        <p:style>
+          <a:lnRef idx="1">
+            <a:schemeClr val="accent1"/>
+          </a:lnRef>
+          <a:fillRef idx="3">
+            <a:schemeClr val="accent1"/>
+          </a:fillRef>
+          <a:effectRef idx="2">
+            <a:schemeClr val="accent1"/>
+          </a:effectRef>
+          <a:fontRef idx="minor">
+            <a:schemeClr val="lt1"/>
+          </a:fontRef>
+        </p:style>
+        <p:txBody>
+          <a:bodyPr rtlCol="0" anchor="ctr"/>
+          <a:lstStyle/>
+          <a:p>
+            <a:pPr algn="ctr"/>
+          </a:p>
+        </p:txBody>
+      </p:sp>
+      <p:sp>
+        <p:nvSpPr>
+          <p:cNvPr id="7" name="TextBox 6"/>
           <p:cNvSpPr txBox="1"/>
           <p:nvPr/>
         </p:nvSpPr>
         <p:spPr>
           <a:xfrm>
-            <a:off x="914400" y="3017520"/>
-            <a:ext cx="10058400" cy="548640"/>
+            <a:off x="731520" y="1051560"/>
+            <a:ext cx="1828800" cy="228600"/>
           </a:xfrm>
           <a:prstGeom prst="rect">
             <a:avLst/>
@@ -4167,8 +4504,8 @@
           </a:bodyPr>
           <a:lstStyle/>
           <a:p>
-            <a:pPr algn="ctr">
-              <a:defRPr sz="2400" b="0">
+            <a:pPr algn="l">
+              <a:defRPr sz="900" b="1">
                 <a:solidFill>
                   <a:srgbClr val="F97316"/>
                 </a:solidFill>
@@ -4176,21 +4513,21 @@
               </a:defRPr>
             </a:pPr>
             <a:r>
-              <a:t>RMSTU Digital Election Hub</a:t>
-            </a:r>
-          </a:p>
-        </p:txBody>
-      </p:sp>
-      <p:sp>
-        <p:nvSpPr>
-          <p:cNvPr id="6" name="TextBox 5"/>
+              <a:t>  Console Output</a:t>
+            </a:r>
+          </a:p>
+        </p:txBody>
+      </p:sp>
+      <p:sp>
+        <p:nvSpPr>
+          <p:cNvPr id="8" name="TextBox 7"/>
           <p:cNvSpPr txBox="1"/>
           <p:nvPr/>
         </p:nvSpPr>
         <p:spPr>
           <a:xfrm>
-            <a:off x="914400" y="3840480"/>
-            <a:ext cx="10058400" cy="457200"/>
+            <a:off x="731520" y="1280160"/>
+            <a:ext cx="10698480" cy="5120640"/>
           </a:xfrm>
           <a:prstGeom prst="rect">
             <a:avLst/>
@@ -4203,29 +4540,643 @@
           </a:bodyPr>
           <a:lstStyle/>
           <a:p>
+            <a:pPr algn="l">
+              <a:defRPr sz="900" b="0">
+                <a:solidFill>
+                  <a:srgbClr val="A0FFA0"/>
+                </a:solidFill>
+                <a:latin typeface="Calibri"/>
+              </a:defRPr>
+            </a:pPr>
+            <a:r>
+              <a:t>=========================================</a:t>
+            </a:r>
+            <a:br/>
+            <a:r>
+              <a:t>    RMSTU DIGITAL ELECTION HUB</a:t>
+            </a:r>
+            <a:br/>
+            <a:r>
+              <a:t>=========================================</a:t>
+            </a:r>
+            <a:br/>
+            <a:br/>
+            <a:r>
+              <a:t>  --- President ---</a:t>
+            </a:r>
+            <a:br/>
+            <a:r>
+              <a:t>   #1 Alice              42 votes</a:t>
+            </a:r>
+            <a:br/>
+            <a:r>
+              <a:t>   #2 Bob                15 votes</a:t>
+            </a:r>
+            <a:br/>
+            <a:br/>
+            <a:r>
+              <a:t>  --- General Secretary ---</a:t>
+            </a:r>
+            <a:br/>
+            <a:r>
+              <a:t>   #1 Charlie            30 votes</a:t>
+            </a:r>
+            <a:br/>
+            <a:r>
+              <a:t>   #2 David              10 votes</a:t>
+            </a:r>
+            <a:br/>
+            <a:br/>
+            <a:r>
+              <a:t>  OFFICIAL WINNER: Alice</a:t>
+            </a:r>
+            <a:br/>
+            <a:br/>
+            <a:r>
+              <a:t>=========================================</a:t>
+            </a:r>
+            <a:br/>
+            <a:r>
+              <a:t>[SYSTEM] All election data has been reset.</a:t>
+            </a:r>
+            <a:br/>
+            <a:r>
+              <a:t>[SYSTEM] Users deleted. Must re-register.</a:t>
+            </a:r>
+          </a:p>
+        </p:txBody>
+      </p:sp>
+    </p:spTree>
+  </p:cSld>
+  <p:clrMapOvr>
+    <a:masterClrMapping/>
+  </p:clrMapOvr>
+</p:sld>
+</file>
+
+<file path=ppt/slides/slide13.xml><?xml version="1.0" encoding="utf-8"?>
+<p:sld xmlns:a="http://schemas.openxmlformats.org/drawingml/2006/main" xmlns:p="http://schemas.openxmlformats.org/presentationml/2006/main" xmlns:r="http://schemas.openxmlformats.org/officeDocument/2006/relationships">
+  <p:cSld>
+    <p:bg>
+      <p:bgPr>
+        <a:solidFill>
+          <a:srgbClr val="0F0F0F"/>
+        </a:solidFill>
+        <a:effectLst/>
+      </p:bgPr>
+    </p:bg>
+    <p:spTree>
+      <p:nvGrpSpPr>
+        <p:cNvPr id="1" name=""/>
+        <p:cNvGrpSpPr/>
+        <p:nvPr/>
+      </p:nvGrpSpPr>
+      <p:grpSpPr/>
+      <p:sp>
+        <p:nvSpPr>
+          <p:cNvPr id="2" name="Rounded Rectangle 1"/>
+          <p:cNvSpPr/>
+          <p:nvPr/>
+        </p:nvSpPr>
+        <p:spPr>
+          <a:xfrm>
+            <a:off x="0" y="0"/>
+            <a:ext cx="12191695" cy="54864"/>
+          </a:xfrm>
+          <a:prstGeom prst="roundRect">
+            <a:avLst/>
+          </a:prstGeom>
+          <a:solidFill>
+            <a:srgbClr val="06B6D4"/>
+          </a:solidFill>
+          <a:ln>
+            <a:noFill/>
+          </a:ln>
+        </p:spPr>
+        <p:style>
+          <a:lnRef idx="1">
+            <a:schemeClr val="accent1"/>
+          </a:lnRef>
+          <a:fillRef idx="3">
+            <a:schemeClr val="accent1"/>
+          </a:fillRef>
+          <a:effectRef idx="2">
+            <a:schemeClr val="accent1"/>
+          </a:effectRef>
+          <a:fontRef idx="minor">
+            <a:schemeClr val="lt1"/>
+          </a:fontRef>
+        </p:style>
+        <p:txBody>
+          <a:bodyPr rtlCol="0" anchor="ctr"/>
+          <a:lstStyle/>
+          <a:p>
+            <a:pPr algn="ctr"/>
+          </a:p>
+        </p:txBody>
+      </p:sp>
+      <p:sp>
+        <p:nvSpPr>
+          <p:cNvPr id="3" name="TextBox 2"/>
+          <p:cNvSpPr txBox="1"/>
+          <p:nvPr/>
+        </p:nvSpPr>
+        <p:spPr>
+          <a:xfrm>
+            <a:off x="731520" y="365760"/>
+            <a:ext cx="10058400" cy="731520"/>
+          </a:xfrm>
+          <a:prstGeom prst="rect">
+            <a:avLst/>
+          </a:prstGeom>
+          <a:noFill/>
+        </p:spPr>
+        <p:txBody>
+          <a:bodyPr wrap="square">
+            <a:spAutoFit/>
+          </a:bodyPr>
+          <a:lstStyle/>
+          <a:p>
+            <a:pPr algn="l">
+              <a:defRPr sz="3600" b="1">
+                <a:solidFill>
+                  <a:srgbClr val="FFFFFF"/>
+                </a:solidFill>
+                <a:latin typeface="Calibri"/>
+              </a:defRPr>
+            </a:pPr>
+            <a:r>
+              <a:t>FUTURE ENHANCEMENTS</a:t>
+            </a:r>
+          </a:p>
+        </p:txBody>
+      </p:sp>
+      <p:sp>
+        <p:nvSpPr>
+          <p:cNvPr id="4" name="Rounded Rectangle 3"/>
+          <p:cNvSpPr/>
+          <p:nvPr/>
+        </p:nvSpPr>
+        <p:spPr>
+          <a:xfrm>
+            <a:off x="731520" y="1051560"/>
+            <a:ext cx="1828800" cy="36576"/>
+          </a:xfrm>
+          <a:prstGeom prst="roundRect">
+            <a:avLst/>
+          </a:prstGeom>
+          <a:solidFill>
+            <a:srgbClr val="06B6D4"/>
+          </a:solidFill>
+          <a:ln>
+            <a:noFill/>
+          </a:ln>
+        </p:spPr>
+        <p:style>
+          <a:lnRef idx="1">
+            <a:schemeClr val="accent1"/>
+          </a:lnRef>
+          <a:fillRef idx="3">
+            <a:schemeClr val="accent1"/>
+          </a:fillRef>
+          <a:effectRef idx="2">
+            <a:schemeClr val="accent1"/>
+          </a:effectRef>
+          <a:fontRef idx="minor">
+            <a:schemeClr val="lt1"/>
+          </a:fontRef>
+        </p:style>
+        <p:txBody>
+          <a:bodyPr rtlCol="0" anchor="ctr"/>
+          <a:lstStyle/>
+          <a:p>
+            <a:pPr algn="ctr"/>
+          </a:p>
+        </p:txBody>
+      </p:sp>
+      <p:sp>
+        <p:nvSpPr>
+          <p:cNvPr id="5" name="TextBox 4"/>
+          <p:cNvSpPr txBox="1"/>
+          <p:nvPr/>
+        </p:nvSpPr>
+        <p:spPr>
+          <a:xfrm>
+            <a:off x="731520" y="1463040"/>
+            <a:ext cx="10058400" cy="5029200"/>
+          </a:xfrm>
+          <a:prstGeom prst="rect">
+            <a:avLst/>
+          </a:prstGeom>
+          <a:noFill/>
+        </p:spPr>
+        <p:txBody>
+          <a:bodyPr wrap="square">
+            <a:spAutoFit/>
+          </a:bodyPr>
+          <a:lstStyle/>
+          <a:p>
+            <a:pPr>
+              <a:spcAft>
+                <a:spcPts val="500"/>
+              </a:spcAft>
+              <a:defRPr sz="1900">
+                <a:solidFill>
+                  <a:srgbClr val="DDDDDD"/>
+                </a:solidFill>
+                <a:latin typeface="Calibri"/>
+              </a:defRPr>
+            </a:pPr>
+            <a:r>
+              <a:t>  OTP-based voter verification via SMS / Email</a:t>
+            </a:r>
+          </a:p>
+          <a:p>
+            <a:pPr>
+              <a:spcAft>
+                <a:spcPts val="500"/>
+              </a:spcAft>
+              <a:defRPr sz="1900">
+                <a:solidFill>
+                  <a:srgbClr val="DDDDDD"/>
+                </a:solidFill>
+                <a:latin typeface="Calibri"/>
+              </a:defRPr>
+            </a:pPr>
+            <a:r>
+              <a:t>  Blockchain-based vote storage for tamper-proof audit</a:t>
+            </a:r>
+          </a:p>
+          <a:p>
+            <a:pPr>
+              <a:spcAft>
+                <a:spcPts val="500"/>
+              </a:spcAft>
+              <a:defRPr sz="1900">
+                <a:solidFill>
+                  <a:srgbClr val="DDDDDD"/>
+                </a:solidFill>
+                <a:latin typeface="Calibri"/>
+              </a:defRPr>
+            </a:pPr>
+            <a:r>
+              <a:t>  Voter turnout charts &amp; analytics dashboard</a:t>
+            </a:r>
+          </a:p>
+          <a:p>
+            <a:pPr>
+              <a:spcAft>
+                <a:spcPts val="500"/>
+              </a:spcAft>
+              <a:defRPr sz="1900">
+                <a:solidFill>
+                  <a:srgbClr val="DDDDDD"/>
+                </a:solidFill>
+                <a:latin typeface="Calibri"/>
+              </a:defRPr>
+            </a:pPr>
+            <a:r>
+              <a:t>  Multi-language support (Bengali + English)</a:t>
+            </a:r>
+          </a:p>
+          <a:p>
+            <a:pPr>
+              <a:spcAft>
+                <a:spcPts val="500"/>
+              </a:spcAft>
+              <a:defRPr sz="1900">
+                <a:solidFill>
+                  <a:srgbClr val="DDDDDD"/>
+                </a:solidFill>
+                <a:latin typeface="Calibri"/>
+              </a:defRPr>
+            </a:pPr>
+            <a:r>
+              <a:t>  Mobile App (Android / iOS with Flutter)</a:t>
+            </a:r>
+          </a:p>
+          <a:p>
+            <a:pPr>
+              <a:spcAft>
+                <a:spcPts val="500"/>
+              </a:spcAft>
+              <a:defRPr sz="1900">
+                <a:solidFill>
+                  <a:srgbClr val="DDDDDD"/>
+                </a:solidFill>
+                <a:latin typeface="Calibri"/>
+              </a:defRPr>
+            </a:pPr>
+            <a:r>
+              <a:t>  Biometric / Fingerprint authentication</a:t>
+            </a:r>
+          </a:p>
+          <a:p>
+            <a:pPr>
+              <a:spcAft>
+                <a:spcPts val="500"/>
+              </a:spcAft>
+              <a:defRPr sz="1900">
+                <a:solidFill>
+                  <a:srgbClr val="DDDDDD"/>
+                </a:solidFill>
+                <a:latin typeface="Calibri"/>
+              </a:defRPr>
+            </a:pPr>
+            <a:r>
+              <a:t>  Export results as PDF / Excel</a:t>
+            </a:r>
+          </a:p>
+          <a:p>
+            <a:pPr>
+              <a:spcAft>
+                <a:spcPts val="500"/>
+              </a:spcAft>
+              <a:defRPr sz="1900">
+                <a:solidFill>
+                  <a:srgbClr val="DDDDDD"/>
+                </a:solidFill>
+                <a:latin typeface="Calibri"/>
+              </a:defRPr>
+            </a:pPr>
+            <a:r>
+              <a:t>  Java Spring Boot REST API (replace Firebase)</a:t>
+            </a:r>
+          </a:p>
+        </p:txBody>
+      </p:sp>
+    </p:spTree>
+  </p:cSld>
+  <p:clrMapOvr>
+    <a:masterClrMapping/>
+  </p:clrMapOvr>
+</p:sld>
+</file>
+
+<file path=ppt/slides/slide14.xml><?xml version="1.0" encoding="utf-8"?>
+<p:sld xmlns:a="http://schemas.openxmlformats.org/drawingml/2006/main" xmlns:p="http://schemas.openxmlformats.org/presentationml/2006/main" xmlns:r="http://schemas.openxmlformats.org/officeDocument/2006/relationships">
+  <p:cSld>
+    <p:bg>
+      <p:bgPr>
+        <a:solidFill>
+          <a:srgbClr val="16162E"/>
+        </a:solidFill>
+        <a:effectLst/>
+      </p:bgPr>
+    </p:bg>
+    <p:spTree>
+      <p:nvGrpSpPr>
+        <p:cNvPr id="1" name=""/>
+        <p:cNvGrpSpPr/>
+        <p:nvPr/>
+      </p:nvGrpSpPr>
+      <p:grpSpPr/>
+      <p:sp>
+        <p:nvSpPr>
+          <p:cNvPr id="2" name="Rounded Rectangle 1"/>
+          <p:cNvSpPr/>
+          <p:nvPr/>
+        </p:nvSpPr>
+        <p:spPr>
+          <a:xfrm>
+            <a:off x="0" y="0"/>
+            <a:ext cx="12191695" cy="164592"/>
+          </a:xfrm>
+          <a:prstGeom prst="roundRect">
+            <a:avLst/>
+          </a:prstGeom>
+          <a:solidFill>
+            <a:srgbClr val="F97316"/>
+          </a:solidFill>
+          <a:ln>
+            <a:noFill/>
+          </a:ln>
+        </p:spPr>
+        <p:style>
+          <a:lnRef idx="1">
+            <a:schemeClr val="accent1"/>
+          </a:lnRef>
+          <a:fillRef idx="3">
+            <a:schemeClr val="accent1"/>
+          </a:fillRef>
+          <a:effectRef idx="2">
+            <a:schemeClr val="accent1"/>
+          </a:effectRef>
+          <a:fontRef idx="minor">
+            <a:schemeClr val="lt1"/>
+          </a:fontRef>
+        </p:style>
+        <p:txBody>
+          <a:bodyPr rtlCol="0" anchor="ctr"/>
+          <a:lstStyle/>
+          <a:p>
+            <a:pPr algn="ctr"/>
+          </a:p>
+        </p:txBody>
+      </p:sp>
+      <p:sp>
+        <p:nvSpPr>
+          <p:cNvPr id="3" name="Rounded Rectangle 2"/>
+          <p:cNvSpPr/>
+          <p:nvPr/>
+        </p:nvSpPr>
+        <p:spPr>
+          <a:xfrm>
+            <a:off x="0" y="6693408"/>
+            <a:ext cx="12191695" cy="164592"/>
+          </a:xfrm>
+          <a:prstGeom prst="roundRect">
+            <a:avLst/>
+          </a:prstGeom>
+          <a:solidFill>
+            <a:srgbClr val="F97316"/>
+          </a:solidFill>
+          <a:ln>
+            <a:noFill/>
+          </a:ln>
+        </p:spPr>
+        <p:style>
+          <a:lnRef idx="1">
+            <a:schemeClr val="accent1"/>
+          </a:lnRef>
+          <a:fillRef idx="3">
+            <a:schemeClr val="accent1"/>
+          </a:fillRef>
+          <a:effectRef idx="2">
+            <a:schemeClr val="accent1"/>
+          </a:effectRef>
+          <a:fontRef idx="minor">
+            <a:schemeClr val="lt1"/>
+          </a:fontRef>
+        </p:style>
+        <p:txBody>
+          <a:bodyPr rtlCol="0" anchor="ctr"/>
+          <a:lstStyle/>
+          <a:p>
+            <a:pPr algn="ctr"/>
+          </a:p>
+        </p:txBody>
+      </p:sp>
+      <p:sp>
+        <p:nvSpPr>
+          <p:cNvPr id="4" name="TextBox 3"/>
+          <p:cNvSpPr txBox="1"/>
+          <p:nvPr/>
+        </p:nvSpPr>
+        <p:spPr>
+          <a:xfrm>
+            <a:off x="914400" y="1828800"/>
+            <a:ext cx="10058400" cy="1097280"/>
+          </a:xfrm>
+          <a:prstGeom prst="rect">
+            <a:avLst/>
+          </a:prstGeom>
+          <a:noFill/>
+        </p:spPr>
+        <p:txBody>
+          <a:bodyPr wrap="square">
+            <a:spAutoFit/>
+          </a:bodyPr>
+          <a:lstStyle/>
+          <a:p>
+            <a:pPr algn="ctr">
+              <a:defRPr sz="5200" b="1">
+                <a:solidFill>
+                  <a:srgbClr val="FFFFFF"/>
+                </a:solidFill>
+                <a:latin typeface="Calibri"/>
+              </a:defRPr>
+            </a:pPr>
+            <a:r>
+              <a:t>THANK YOU</a:t>
+            </a:r>
+          </a:p>
+        </p:txBody>
+      </p:sp>
+      <p:sp>
+        <p:nvSpPr>
+          <p:cNvPr id="5" name="Rounded Rectangle 4"/>
+          <p:cNvSpPr/>
+          <p:nvPr/>
+        </p:nvSpPr>
+        <p:spPr>
+          <a:xfrm>
+            <a:off x="5029200" y="3017520"/>
+            <a:ext cx="2133295" cy="45720"/>
+          </a:xfrm>
+          <a:prstGeom prst="roundRect">
+            <a:avLst/>
+          </a:prstGeom>
+          <a:solidFill>
+            <a:srgbClr val="F97316"/>
+          </a:solidFill>
+          <a:ln>
+            <a:noFill/>
+          </a:ln>
+        </p:spPr>
+        <p:style>
+          <a:lnRef idx="1">
+            <a:schemeClr val="accent1"/>
+          </a:lnRef>
+          <a:fillRef idx="3">
+            <a:schemeClr val="accent1"/>
+          </a:fillRef>
+          <a:effectRef idx="2">
+            <a:schemeClr val="accent1"/>
+          </a:effectRef>
+          <a:fontRef idx="minor">
+            <a:schemeClr val="lt1"/>
+          </a:fontRef>
+        </p:style>
+        <p:txBody>
+          <a:bodyPr rtlCol="0" anchor="ctr"/>
+          <a:lstStyle/>
+          <a:p>
+            <a:pPr algn="ctr"/>
+          </a:p>
+        </p:txBody>
+      </p:sp>
+      <p:sp>
+        <p:nvSpPr>
+          <p:cNvPr id="6" name="TextBox 5"/>
+          <p:cNvSpPr txBox="1"/>
+          <p:nvPr/>
+        </p:nvSpPr>
+        <p:spPr>
+          <a:xfrm>
+            <a:off x="914400" y="3383280"/>
+            <a:ext cx="10058400" cy="548640"/>
+          </a:xfrm>
+          <a:prstGeom prst="rect">
+            <a:avLst/>
+          </a:prstGeom>
+          <a:noFill/>
+        </p:spPr>
+        <p:txBody>
+          <a:bodyPr wrap="square">
+            <a:spAutoFit/>
+          </a:bodyPr>
+          <a:lstStyle/>
+          <a:p>
+            <a:pPr algn="ctr">
+              <a:defRPr sz="2400" b="0">
+                <a:solidFill>
+                  <a:srgbClr val="F97316"/>
+                </a:solidFill>
+                <a:latin typeface="Calibri"/>
+              </a:defRPr>
+            </a:pPr>
+            <a:r>
+              <a:t>RMSTU Digital Election Hub</a:t>
+            </a:r>
+          </a:p>
+        </p:txBody>
+      </p:sp>
+      <p:sp>
+        <p:nvSpPr>
+          <p:cNvPr id="7" name="TextBox 6"/>
+          <p:cNvSpPr txBox="1"/>
+          <p:nvPr/>
+        </p:nvSpPr>
+        <p:spPr>
+          <a:xfrm>
+            <a:off x="914400" y="4114800"/>
+            <a:ext cx="10058400" cy="457200"/>
+          </a:xfrm>
+          <a:prstGeom prst="rect">
+            <a:avLst/>
+          </a:prstGeom>
+          <a:noFill/>
+        </p:spPr>
+        <p:txBody>
+          <a:bodyPr wrap="square">
+            <a:spAutoFit/>
+          </a:bodyPr>
+          <a:lstStyle/>
+          <a:p>
             <a:pPr algn="ctr">
               <a:defRPr sz="2000" b="0">
                 <a:solidFill>
-                  <a:srgbClr val="CCCCCC"/>
-                </a:solidFill>
-                <a:latin typeface="Calibri"/>
-              </a:defRPr>
-            </a:pPr>
-            <a:r>
-              <a:t>Questions &amp; Discussion Welcome</a:t>
-            </a:r>
-          </a:p>
-        </p:txBody>
-      </p:sp>
-      <p:sp>
-        <p:nvSpPr>
-          <p:cNvPr id="7" name="TextBox 6"/>
+                  <a:srgbClr val="DDDDDD"/>
+                </a:solidFill>
+                <a:latin typeface="Calibri"/>
+              </a:defRPr>
+            </a:pPr>
+            <a:r>
+              <a:t>Questions &amp; Discussion Welcome!</a:t>
+            </a:r>
+          </a:p>
+        </p:txBody>
+      </p:sp>
+      <p:sp>
+        <p:nvSpPr>
+          <p:cNvPr id="8" name="TextBox 7"/>
           <p:cNvSpPr txBox="1"/>
           <p:nvPr/>
         </p:nvSpPr>
         <p:spPr>
           <a:xfrm>
-            <a:off x="914400" y="4754880"/>
+            <a:off x="914400" y="5029200"/>
             <a:ext cx="10058400" cy="457200"/>
           </a:xfrm>
           <a:prstGeom prst="rect">
@@ -4294,7 +5245,7 @@
             <a:avLst/>
           </a:prstGeom>
           <a:solidFill>
-            <a:srgbClr val="F97316"/>
+            <a:srgbClr val="EF4444"/>
           </a:solidFill>
           <a:ln>
             <a:noFill/>
@@ -4330,7 +5281,7 @@
         </p:nvSpPr>
         <p:spPr>
           <a:xfrm>
-            <a:off x="731520" y="457200"/>
+            <a:off x="731520" y="365760"/>
             <a:ext cx="10058400" cy="731520"/>
           </a:xfrm>
           <a:prstGeom prst="rect">
@@ -4366,14 +5317,14 @@
         </p:nvSpPr>
         <p:spPr>
           <a:xfrm>
-            <a:off x="731520" y="1188720"/>
+            <a:off x="731520" y="1051560"/>
             <a:ext cx="1828800" cy="36576"/>
           </a:xfrm>
           <a:prstGeom prst="roundRect">
             <a:avLst/>
           </a:prstGeom>
           <a:solidFill>
-            <a:srgbClr val="F97316"/>
+            <a:srgbClr val="EF4444"/>
           </a:solidFill>
           <a:ln>
             <a:noFill/>
@@ -4409,7 +5360,7 @@
         </p:nvSpPr>
         <p:spPr>
           <a:xfrm>
-            <a:off x="731520" y="1645920"/>
+            <a:off x="731520" y="1463040"/>
             <a:ext cx="10058400" cy="4572000"/>
           </a:xfrm>
           <a:prstGeom prst="rect">
@@ -4425,81 +5376,97 @@
           <a:p>
             <a:pPr>
               <a:spcAft>
-                <a:spcPts val="600"/>
+                <a:spcPts val="500"/>
               </a:spcAft>
-              <a:defRPr sz="1800">
-                <a:solidFill>
-                  <a:srgbClr val="CCCCCC"/>
-                </a:solidFill>
-                <a:latin typeface="Calibri"/>
-              </a:defRPr>
-            </a:pPr>
-            <a:r>
-              <a:t>⚠  Traditional paper-based voting is slow, costly, and prone to errors</a:t>
+              <a:defRPr sz="1900">
+                <a:solidFill>
+                  <a:srgbClr val="DDDDDD"/>
+                </a:solidFill>
+                <a:latin typeface="Calibri"/>
+              </a:defRPr>
+            </a:pPr>
+            <a:r>
+              <a:t>  Manual paper-based voting is time-consuming &amp; error-prone</a:t>
             </a:r>
           </a:p>
           <a:p>
             <a:pPr>
               <a:spcAft>
-                <a:spcPts val="600"/>
+                <a:spcPts val="500"/>
               </a:spcAft>
-              <a:defRPr sz="1800">
-                <a:solidFill>
-                  <a:srgbClr val="CCCCCC"/>
-                </a:solidFill>
-                <a:latin typeface="Calibri"/>
-              </a:defRPr>
-            </a:pPr>
-            <a:r>
-              <a:t>⚠  Manual vote counting takes days — results are delayed</a:t>
+              <a:defRPr sz="1900">
+                <a:solidFill>
+                  <a:srgbClr val="DDDDDD"/>
+                </a:solidFill>
+                <a:latin typeface="Calibri"/>
+              </a:defRPr>
+            </a:pPr>
+            <a:r>
+              <a:t>  Vote counting takes days — delayed results</a:t>
             </a:r>
           </a:p>
           <a:p>
             <a:pPr>
               <a:spcAft>
-                <a:spcPts val="600"/>
+                <a:spcPts val="500"/>
               </a:spcAft>
-              <a:defRPr sz="1800">
-                <a:solidFill>
-                  <a:srgbClr val="CCCCCC"/>
-                </a:solidFill>
-                <a:latin typeface="Calibri"/>
-              </a:defRPr>
-            </a:pPr>
-            <a:r>
-              <a:t>⚠  No transparency — students cannot verify their votes were counted</a:t>
+              <a:defRPr sz="1900">
+                <a:solidFill>
+                  <a:srgbClr val="DDDDDD"/>
+                </a:solidFill>
+                <a:latin typeface="Calibri"/>
+              </a:defRPr>
+            </a:pPr>
+            <a:r>
+              <a:t>  No transparency in the voting process</a:t>
             </a:r>
           </a:p>
           <a:p>
             <a:pPr>
               <a:spcAft>
-                <a:spcPts val="600"/>
+                <a:spcPts val="500"/>
               </a:spcAft>
-              <a:defRPr sz="1800">
-                <a:solidFill>
-                  <a:srgbClr val="CCCCCC"/>
-                </a:solidFill>
-                <a:latin typeface="Calibri"/>
-              </a:defRPr>
-            </a:pPr>
-            <a:r>
-              <a:t>⚠  Candidate manifestos not easily accessible to voters</a:t>
+              <a:defRPr sz="1900">
+                <a:solidFill>
+                  <a:srgbClr val="DDDDDD"/>
+                </a:solidFill>
+                <a:latin typeface="Calibri"/>
+              </a:defRPr>
+            </a:pPr>
+            <a:r>
+              <a:t>  Candidate manifestos not accessible to voters</a:t>
             </a:r>
           </a:p>
           <a:p>
             <a:pPr>
               <a:spcAft>
-                <a:spcPts val="600"/>
+                <a:spcPts val="500"/>
               </a:spcAft>
-              <a:defRPr sz="1800">
-                <a:solidFill>
-                  <a:srgbClr val="CCCCCC"/>
-                </a:solidFill>
-                <a:latin typeface="Calibri"/>
-              </a:defRPr>
-            </a:pPr>
-            <a:r>
-              <a:t>⚠  Security concerns with ballot box tampering</a:t>
+              <a:defRPr sz="1900">
+                <a:solidFill>
+                  <a:srgbClr val="DDDDDD"/>
+                </a:solidFill>
+                <a:latin typeface="Calibri"/>
+              </a:defRPr>
+            </a:pPr>
+            <a:r>
+              <a:t>  Ballot box tampering &amp; security concerns</a:t>
+            </a:r>
+          </a:p>
+          <a:p>
+            <a:pPr>
+              <a:spcAft>
+                <a:spcPts val="500"/>
+              </a:spcAft>
+              <a:defRPr sz="1900">
+                <a:solidFill>
+                  <a:srgbClr val="DDDDDD"/>
+                </a:solidFill>
+                <a:latin typeface="Calibri"/>
+              </a:defRPr>
+            </a:pPr>
+            <a:r>
+              <a:t>  Low voter turnout due to inconvenient process</a:t>
             </a:r>
           </a:p>
         </p:txBody>
@@ -4581,7 +5548,7 @@
         </p:nvSpPr>
         <p:spPr>
           <a:xfrm>
-            <a:off x="731520" y="457200"/>
+            <a:off x="731520" y="365760"/>
             <a:ext cx="10058400" cy="731520"/>
           </a:xfrm>
           <a:prstGeom prst="rect">
@@ -4617,7 +5584,7 @@
         </p:nvSpPr>
         <p:spPr>
           <a:xfrm>
-            <a:off x="731520" y="1188720"/>
+            <a:off x="731520" y="1051560"/>
             <a:ext cx="1828800" cy="36576"/>
           </a:xfrm>
           <a:prstGeom prst="roundRect">
@@ -4660,8 +5627,8 @@
         </p:nvSpPr>
         <p:spPr>
           <a:xfrm>
-            <a:off x="731520" y="1645920"/>
-            <a:ext cx="10058400" cy="4572000"/>
+            <a:off x="731520" y="1463040"/>
+            <a:ext cx="5486400" cy="4572000"/>
           </a:xfrm>
           <a:prstGeom prst="rect">
             <a:avLst/>
@@ -4676,101 +5643,141 @@
           <a:p>
             <a:pPr>
               <a:spcAft>
-                <a:spcPts val="600"/>
+                <a:spcPts val="500"/>
               </a:spcAft>
               <a:defRPr sz="1800">
                 <a:solidFill>
-                  <a:srgbClr val="CCCCCC"/>
-                </a:solidFill>
-                <a:latin typeface="Calibri"/>
-              </a:defRPr>
-            </a:pPr>
-            <a:r>
-              <a:t>  Fully digital online voting platform — vote from anywhere</a:t>
+                  <a:srgbClr val="DDDDDD"/>
+                </a:solidFill>
+                <a:latin typeface="Calibri"/>
+              </a:defRPr>
+            </a:pPr>
+            <a:r>
+              <a:t>  Fully digital — vote from anywhere, any device</a:t>
             </a:r>
           </a:p>
           <a:p>
             <a:pPr>
               <a:spcAft>
-                <a:spcPts val="600"/>
+                <a:spcPts val="500"/>
               </a:spcAft>
               <a:defRPr sz="1800">
                 <a:solidFill>
-                  <a:srgbClr val="CCCCCC"/>
-                </a:solidFill>
-                <a:latin typeface="Calibri"/>
-              </a:defRPr>
-            </a:pPr>
-            <a:r>
-              <a:t>  Instant result generation with per-post vote counting</a:t>
+                  <a:srgbClr val="DDDDDD"/>
+                </a:solidFill>
+                <a:latin typeface="Calibri"/>
+              </a:defRPr>
+            </a:pPr>
+            <a:r>
+              <a:t>  Instant results — real-time vote counting</a:t>
             </a:r>
           </a:p>
           <a:p>
             <a:pPr>
               <a:spcAft>
-                <a:spcPts val="600"/>
+                <a:spcPts val="500"/>
               </a:spcAft>
               <a:defRPr sz="1800">
                 <a:solidFill>
-                  <a:srgbClr val="CCCCCC"/>
-                </a:solidFill>
-                <a:latin typeface="Calibri"/>
-              </a:defRPr>
-            </a:pPr>
-            <a:r>
-              <a:t>  Real-time leaderboard — voters can track results live</a:t>
+                  <a:srgbClr val="DDDDDD"/>
+                </a:solidFill>
+                <a:latin typeface="Calibri"/>
+              </a:defRPr>
+            </a:pPr>
+            <a:r>
+              <a:t>  Transparent — live leaderboard for all voters</a:t>
             </a:r>
           </a:p>
           <a:p>
             <a:pPr>
               <a:spcAft>
-                <a:spcPts val="600"/>
+                <a:spcPts val="500"/>
               </a:spcAft>
               <a:defRPr sz="1800">
                 <a:solidFill>
-                  <a:srgbClr val="CCCCCC"/>
-                </a:solidFill>
-                <a:latin typeface="Calibri"/>
-              </a:defRPr>
-            </a:pPr>
-            <a:r>
-              <a:t>  Candidate profiles with manifesto for informed voting</a:t>
+                  <a:srgbClr val="DDDDDD"/>
+                </a:solidFill>
+                <a:latin typeface="Calibri"/>
+              </a:defRPr>
+            </a:pPr>
+            <a:r>
+              <a:t>  Candidate profiles with manifestos</a:t>
             </a:r>
           </a:p>
           <a:p>
             <a:pPr>
               <a:spcAft>
-                <a:spcPts val="600"/>
+                <a:spcPts val="500"/>
               </a:spcAft>
               <a:defRPr sz="1800">
                 <a:solidFill>
-                  <a:srgbClr val="CCCCCC"/>
-                </a:solidFill>
-                <a:latin typeface="Calibri"/>
-              </a:defRPr>
-            </a:pPr>
-            <a:r>
-              <a:t>  Role-based access: Admin, Voter, Candidate</a:t>
+                  <a:srgbClr val="DDDDDD"/>
+                </a:solidFill>
+                <a:latin typeface="Calibri"/>
+              </a:defRPr>
+            </a:pPr>
+            <a:r>
+              <a:t>  Role-based access: Admin / Voter / Candidate</a:t>
             </a:r>
           </a:p>
           <a:p>
             <a:pPr>
               <a:spcAft>
-                <a:spcPts val="600"/>
+                <a:spcPts val="500"/>
               </a:spcAft>
               <a:defRPr sz="1800">
                 <a:solidFill>
-                  <a:srgbClr val="CCCCCC"/>
-                </a:solidFill>
-                <a:latin typeface="Calibri"/>
-              </a:defRPr>
-            </a:pPr>
-            <a:r>
-              <a:t>  Dark/Light theme — modern UI for all devices</a:t>
-            </a:r>
-          </a:p>
-        </p:txBody>
-      </p:sp>
+                  <a:srgbClr val="DDDDDD"/>
+                </a:solidFill>
+                <a:latin typeface="Calibri"/>
+              </a:defRPr>
+            </a:pPr>
+            <a:r>
+              <a:t>  Secure backend with Firebase Security Rules</a:t>
+            </a:r>
+          </a:p>
+          <a:p>
+            <a:pPr>
+              <a:spcAft>
+                <a:spcPts val="500"/>
+              </a:spcAft>
+              <a:defRPr sz="1800">
+                <a:solidFill>
+                  <a:srgbClr val="DDDDDD"/>
+                </a:solidFill>
+                <a:latin typeface="Calibri"/>
+              </a:defRPr>
+            </a:pPr>
+            <a:r>
+              <a:t>  Dark/Light theme — modern responsive UI</a:t>
+            </a:r>
+          </a:p>
+        </p:txBody>
+      </p:sp>
+      <p:pic>
+        <p:nvPicPr>
+          <p:cNvPr id="6" name="Picture 5" descr="ss_01_overview.png"/>
+          <p:cNvPicPr>
+            <a:picLocks noChangeAspect="1"/>
+          </p:cNvPicPr>
+          <p:nvPr/>
+        </p:nvPicPr>
+        <p:blipFill>
+          <a:blip r:embed="rId2"/>
+          <a:stretch>
+            <a:fillRect/>
+          </a:stretch>
+        </p:blipFill>
+        <p:spPr>
+          <a:xfrm>
+            <a:off x="6858000" y="1371600"/>
+            <a:ext cx="4846320" cy="5029200"/>
+          </a:xfrm>
+          <a:prstGeom prst="rect">
+            <a:avLst/>
+          </a:prstGeom>
+        </p:spPr>
+      </p:pic>
     </p:spTree>
   </p:cSld>
   <p:clrMapOvr>
@@ -4848,7 +5855,7 @@
         </p:nvSpPr>
         <p:spPr>
           <a:xfrm>
-            <a:off x="731520" y="457200"/>
+            <a:off x="731520" y="365760"/>
             <a:ext cx="10058400" cy="731520"/>
           </a:xfrm>
           <a:prstGeom prst="rect">
@@ -4884,7 +5891,7 @@
         </p:nvSpPr>
         <p:spPr>
           <a:xfrm>
-            <a:off x="731520" y="1188720"/>
+            <a:off x="731520" y="1051560"/>
             <a:ext cx="1828800" cy="36576"/>
           </a:xfrm>
           <a:prstGeom prst="roundRect">
@@ -4927,14 +5934,14 @@
         </p:nvSpPr>
         <p:spPr>
           <a:xfrm>
-            <a:off x="731520" y="1645920"/>
-            <a:ext cx="3474720" cy="4572000"/>
+            <a:off x="731520" y="1463040"/>
+            <a:ext cx="3383280" cy="4846320"/>
           </a:xfrm>
           <a:prstGeom prst="roundRect">
             <a:avLst/>
           </a:prstGeom>
           <a:solidFill>
-            <a:srgbClr val="1A1A2E"/>
+            <a:srgbClr val="1E1E3A"/>
           </a:solidFill>
           <a:ln>
             <a:noFill/>
@@ -4970,8 +5977,8 @@
         </p:nvSpPr>
         <p:spPr>
           <a:xfrm>
-            <a:off x="731520" y="1645920"/>
-            <a:ext cx="3474720" cy="50800"/>
+            <a:off x="731520" y="1463040"/>
+            <a:ext cx="3383280" cy="50800"/>
           </a:xfrm>
           <a:prstGeom prst="roundRect">
             <a:avLst/>
@@ -5013,8 +6020,8 @@
         </p:nvSpPr>
         <p:spPr>
           <a:xfrm>
-            <a:off x="1005840" y="1920240"/>
-            <a:ext cx="2926080" cy="457200"/>
+            <a:off x="1005840" y="1691640"/>
+            <a:ext cx="2834640" cy="365760"/>
           </a:xfrm>
           <a:prstGeom prst="rect">
             <a:avLst/>
@@ -5028,7 +6035,7 @@
           <a:lstStyle/>
           <a:p>
             <a:pPr algn="l">
-              <a:defRPr sz="1800" b="1">
+              <a:defRPr sz="1600" b="1">
                 <a:solidFill>
                   <a:srgbClr val="06B6D4"/>
                 </a:solidFill>
@@ -5049,8 +6056,8 @@
         </p:nvSpPr>
         <p:spPr>
           <a:xfrm>
-            <a:off x="1005840" y="2468880"/>
-            <a:ext cx="2926080" cy="3474720"/>
+            <a:off x="1005840" y="2148840"/>
+            <a:ext cx="2834640" cy="3931920"/>
           </a:xfrm>
           <a:prstGeom prst="rect">
             <a:avLst/>
@@ -5064,9 +6071,9 @@
           <a:lstStyle/>
           <a:p>
             <a:pPr algn="l">
-              <a:defRPr sz="1400" b="0">
-                <a:solidFill>
-                  <a:srgbClr val="CCCCCC"/>
+              <a:defRPr sz="1300" b="0">
+                <a:solidFill>
+                  <a:srgbClr val="DDDDDD"/>
                 </a:solidFill>
                 <a:latin typeface="Calibri"/>
               </a:defRPr>
@@ -5084,11 +6091,11 @@
             </a:r>
             <a:br/>
             <a:r>
-              <a:t>Framer Motion (Animations)</a:t>
-            </a:r>
-            <a:br/>
-            <a:r>
-              <a:t>Wouter (Routing)</a:t>
+              <a:t>Framer Motion (Anim)</a:t>
+            </a:r>
+            <a:br/>
+            <a:r>
+              <a:t>Wouter (Client Routing)</a:t>
             </a:r>
           </a:p>
         </p:txBody>
@@ -5101,14 +6108,14 @@
         </p:nvSpPr>
         <p:spPr>
           <a:xfrm>
-            <a:off x="4480560" y="1645920"/>
-            <a:ext cx="3474720" cy="4572000"/>
+            <a:off x="4389120" y="1463040"/>
+            <a:ext cx="3383280" cy="4846320"/>
           </a:xfrm>
           <a:prstGeom prst="roundRect">
             <a:avLst/>
           </a:prstGeom>
           <a:solidFill>
-            <a:srgbClr val="1A1A2E"/>
+            <a:srgbClr val="1E1E3A"/>
           </a:solidFill>
           <a:ln>
             <a:noFill/>
@@ -5144,8 +6151,8 @@
         </p:nvSpPr>
         <p:spPr>
           <a:xfrm>
-            <a:off x="4480560" y="1645920"/>
-            <a:ext cx="3474720" cy="50800"/>
+            <a:off x="4389120" y="1463040"/>
+            <a:ext cx="3383280" cy="50800"/>
           </a:xfrm>
           <a:prstGeom prst="roundRect">
             <a:avLst/>
@@ -5187,8 +6194,8 @@
         </p:nvSpPr>
         <p:spPr>
           <a:xfrm>
-            <a:off x="4754880" y="1920240"/>
-            <a:ext cx="2926080" cy="457200"/>
+            <a:off x="4663440" y="1691640"/>
+            <a:ext cx="2834640" cy="365760"/>
           </a:xfrm>
           <a:prstGeom prst="rect">
             <a:avLst/>
@@ -5202,7 +6209,7 @@
           <a:lstStyle/>
           <a:p>
             <a:pPr algn="l">
-              <a:defRPr sz="1800" b="1">
+              <a:defRPr sz="1600" b="1">
                 <a:solidFill>
                   <a:srgbClr val="F97316"/>
                 </a:solidFill>
@@ -5210,7 +6217,7 @@
               </a:defRPr>
             </a:pPr>
             <a:r>
-              <a:t>BACKEND</a:t>
+              <a:t>BACKEND / DATABASE</a:t>
             </a:r>
           </a:p>
         </p:txBody>
@@ -5223,8 +6230,8 @@
         </p:nvSpPr>
         <p:spPr>
           <a:xfrm>
-            <a:off x="4754880" y="2468880"/>
-            <a:ext cx="2926080" cy="3474720"/>
+            <a:off x="4663440" y="2148840"/>
+            <a:ext cx="2834640" cy="3931920"/>
           </a:xfrm>
           <a:prstGeom prst="rect">
             <a:avLst/>
@@ -5238,9 +6245,9 @@
           <a:lstStyle/>
           <a:p>
             <a:pPr algn="l">
-              <a:defRPr sz="1400" b="0">
-                <a:solidFill>
-                  <a:srgbClr val="CCCCCC"/>
+              <a:defRPr sz="1300" b="0">
+                <a:solidFill>
+                  <a:srgbClr val="DDDDDD"/>
                 </a:solidFill>
                 <a:latin typeface="Calibri"/>
               </a:defRPr>
@@ -5250,7 +6257,7 @@
             </a:r>
             <a:br/>
             <a:r>
-              <a:t>(NoSQL Database)</a:t>
+              <a:t>(Real-time NoSQL)</a:t>
             </a:r>
             <a:br/>
             <a:r>
@@ -5258,11 +6265,11 @@
             </a:r>
             <a:br/>
             <a:r>
-              <a:t>Real-time Data Sync</a:t>
-            </a:r>
-            <a:br/>
-            <a:r>
               <a:t>Security Rules</a:t>
+            </a:r>
+            <a:br/>
+            <a:r>
+              <a:t>Serverless</a:t>
             </a:r>
           </a:p>
         </p:txBody>
@@ -5275,14 +6282,14 @@
         </p:nvSpPr>
         <p:spPr>
           <a:xfrm>
-            <a:off x="8229600" y="1645920"/>
-            <a:ext cx="3474720" cy="4572000"/>
+            <a:off x="8046720" y="1463040"/>
+            <a:ext cx="3383280" cy="4846320"/>
           </a:xfrm>
           <a:prstGeom prst="roundRect">
             <a:avLst/>
           </a:prstGeom>
           <a:solidFill>
-            <a:srgbClr val="1A1A2E"/>
+            <a:srgbClr val="1E1E3A"/>
           </a:solidFill>
           <a:ln>
             <a:noFill/>
@@ -5318,8 +6325,8 @@
         </p:nvSpPr>
         <p:spPr>
           <a:xfrm>
-            <a:off x="8229600" y="1645920"/>
-            <a:ext cx="3474720" cy="50800"/>
+            <a:off x="8046720" y="1463040"/>
+            <a:ext cx="3383280" cy="50800"/>
           </a:xfrm>
           <a:prstGeom prst="roundRect">
             <a:avLst/>
@@ -5361,8 +6368,8 @@
         </p:nvSpPr>
         <p:spPr>
           <a:xfrm>
-            <a:off x="8503920" y="1920240"/>
-            <a:ext cx="2926080" cy="457200"/>
+            <a:off x="8321040" y="1691640"/>
+            <a:ext cx="2834640" cy="365760"/>
           </a:xfrm>
           <a:prstGeom prst="rect">
             <a:avLst/>
@@ -5376,7 +6383,7 @@
           <a:lstStyle/>
           <a:p>
             <a:pPr algn="l">
-              <a:defRPr sz="1800" b="1">
+              <a:defRPr sz="1600" b="1">
                 <a:solidFill>
                   <a:srgbClr val="22C55E"/>
                 </a:solidFill>
@@ -5397,8 +6404,8 @@
         </p:nvSpPr>
         <p:spPr>
           <a:xfrm>
-            <a:off x="8503920" y="2468880"/>
-            <a:ext cx="2926080" cy="3474720"/>
+            <a:off x="8321040" y="2148840"/>
+            <a:ext cx="2834640" cy="3931920"/>
           </a:xfrm>
           <a:prstGeom prst="rect">
             <a:avLst/>
@@ -5412,9 +6419,9 @@
           <a:lstStyle/>
           <a:p>
             <a:pPr algn="l">
-              <a:defRPr sz="1400" b="0">
-                <a:solidFill>
-                  <a:srgbClr val="CCCCCC"/>
+              <a:defRPr sz="1300" b="0">
+                <a:solidFill>
+                  <a:srgbClr val="DDDDDD"/>
                 </a:solidFill>
                 <a:latin typeface="Calibri"/>
               </a:defRPr>
@@ -5428,15 +6435,15 @@
             </a:r>
             <a:br/>
             <a:r>
-              <a:t>Collections Framework</a:t>
+              <a:t>Collections: HashMap, List</a:t>
+            </a:r>
+            <a:br/>
+            <a:r>
+              <a:t>Stream API / Lambdas</a:t>
             </a:r>
             <a:br/>
             <a:r>
               <a:t>Scanner I/O</a:t>
-            </a:r>
-            <a:br/>
-            <a:r>
-              <a:t>Firebase Admin SDK</a:t>
             </a:r>
           </a:p>
         </p:txBody>
@@ -5482,7 +6489,7 @@
             <a:avLst/>
           </a:prstGeom>
           <a:solidFill>
-            <a:srgbClr val="FFD700"/>
+            <a:srgbClr val="F97316"/>
           </a:solidFill>
           <a:ln>
             <a:noFill/>
@@ -5518,8 +6525,8 @@
         </p:nvSpPr>
         <p:spPr>
           <a:xfrm>
-            <a:off x="731520" y="457200"/>
-            <a:ext cx="10058400" cy="731520"/>
+            <a:off x="731520" y="274320"/>
+            <a:ext cx="10058400" cy="548640"/>
           </a:xfrm>
           <a:prstGeom prst="rect">
             <a:avLst/>
@@ -5533,7 +6540,7 @@
           <a:lstStyle/>
           <a:p>
             <a:pPr algn="l">
-              <a:defRPr sz="3600" b="1">
+              <a:defRPr sz="3200" b="1">
                 <a:solidFill>
                   <a:srgbClr val="FFFFFF"/>
                 </a:solidFill>
@@ -5541,7 +6548,7 @@
               </a:defRPr>
             </a:pPr>
             <a:r>
-              <a:t>SYSTEM ARCHITECTURE</a:t>
+              <a:t>APPLICATION SCREENS</a:t>
             </a:r>
           </a:p>
         </p:txBody>
@@ -5554,14 +6561,14 @@
         </p:nvSpPr>
         <p:spPr>
           <a:xfrm>
-            <a:off x="731520" y="1188720"/>
+            <a:off x="731520" y="822960"/>
             <a:ext cx="1828800" cy="36576"/>
           </a:xfrm>
           <a:prstGeom prst="roundRect">
             <a:avLst/>
           </a:prstGeom>
           <a:solidFill>
-            <a:srgbClr val="FFD700"/>
+            <a:srgbClr val="F97316"/>
           </a:solidFill>
           <a:ln>
             <a:noFill/>
@@ -5589,16 +6596,40 @@
           </a:p>
         </p:txBody>
       </p:sp>
-      <p:sp>
-        <p:nvSpPr>
-          <p:cNvPr id="5" name="TextBox 4"/>
+      <p:pic>
+        <p:nvPicPr>
+          <p:cNvPr id="5" name="Picture 4" descr="ss_01_overview.png"/>
+          <p:cNvPicPr>
+            <a:picLocks noChangeAspect="1"/>
+          </p:cNvPicPr>
+          <p:nvPr/>
+        </p:nvPicPr>
+        <p:blipFill>
+          <a:blip r:embed="rId2"/>
+          <a:stretch>
+            <a:fillRect/>
+          </a:stretch>
+        </p:blipFill>
+        <p:spPr>
+          <a:xfrm>
+            <a:off x="731520" y="1188720"/>
+            <a:ext cx="3474720" cy="2286000"/>
+          </a:xfrm>
+          <a:prstGeom prst="rect">
+            <a:avLst/>
+          </a:prstGeom>
+        </p:spPr>
+      </p:pic>
+      <p:sp>
+        <p:nvSpPr>
+          <p:cNvPr id="6" name="TextBox 5"/>
           <p:cNvSpPr txBox="1"/>
           <p:nvPr/>
         </p:nvSpPr>
         <p:spPr>
           <a:xfrm>
-            <a:off x="731520" y="1645920"/>
-            <a:ext cx="10058400" cy="5029200"/>
+            <a:off x="731520" y="3200400"/>
+            <a:ext cx="3474720" cy="274320"/>
           </a:xfrm>
           <a:prstGeom prst="rect">
             <a:avLst/>
@@ -5611,157 +6642,256 @@
           </a:bodyPr>
           <a:lstStyle/>
           <a:p>
-            <a:pPr>
-              <a:spcAft>
-                <a:spcPts val="600"/>
-              </a:spcAft>
-              <a:defRPr sz="1700">
-                <a:solidFill>
-                  <a:srgbClr val="CCCCCC"/>
-                </a:solidFill>
-                <a:latin typeface="Calibri"/>
-              </a:defRPr>
-            </a:pPr>
-            <a:r>
-              <a:t>  User Layer: Voter, Candidate, Admin — distinct dashboards</a:t>
-            </a:r>
-          </a:p>
-          <a:p>
-            <a:pPr>
-              <a:spcAft>
-                <a:spcPts val="600"/>
-              </a:spcAft>
-              <a:defRPr sz="1700">
-                <a:solidFill>
-                  <a:srgbClr val="CCCCCC"/>
-                </a:solidFill>
-                <a:latin typeface="Calibri"/>
-              </a:defRPr>
-            </a:pPr>
-            <a:r>
-              <a:t>   - Voter: View candidates, cast vote, see results</a:t>
-            </a:r>
-          </a:p>
-          <a:p>
-            <a:pPr>
-              <a:spcAft>
-                <a:spcPts val="600"/>
-              </a:spcAft>
-              <a:defRPr sz="1700">
-                <a:solidFill>
-                  <a:srgbClr val="CCCCCC"/>
-                </a:solidFill>
-                <a:latin typeface="Calibri"/>
-              </a:defRPr>
-            </a:pPr>
-            <a:r>
-              <a:t>   - Candidate: Apply, submit manifesto, track standings</a:t>
-            </a:r>
-          </a:p>
-          <a:p>
-            <a:pPr>
-              <a:spcAft>
-                <a:spcPts val="600"/>
-              </a:spcAft>
-              <a:defRPr sz="1700">
-                <a:solidFill>
-                  <a:srgbClr val="CCCCCC"/>
-                </a:solidFill>
-                <a:latin typeface="Calibri"/>
-              </a:defRPr>
-            </a:pPr>
-            <a:r>
-              <a:t>   - Admin: Manage elections, approve candidates, declare winners</a:t>
-            </a:r>
-          </a:p>
-          <a:p>
-            <a:pPr>
-              <a:spcAft>
-                <a:spcPts val="600"/>
-              </a:spcAft>
-              <a:defRPr sz="1700">
-                <a:solidFill>
-                  <a:srgbClr val="CCCCCC"/>
-                </a:solidFill>
-                <a:latin typeface="Calibri"/>
-              </a:defRPr>
-            </a:pPr>
-          </a:p>
-          <a:p>
-            <a:pPr>
-              <a:spcAft>
-                <a:spcPts val="600"/>
-              </a:spcAft>
-              <a:defRPr sz="1700">
-                <a:solidFill>
-                  <a:srgbClr val="CCCCCC"/>
-                </a:solidFill>
-                <a:latin typeface="Calibri"/>
-              </a:defRPr>
-            </a:pPr>
-            <a:r>
-              <a:t>  Application Layer: React SPA (Single Page Application)</a:t>
-            </a:r>
-          </a:p>
-          <a:p>
-            <a:pPr>
-              <a:spcAft>
-                <a:spcPts val="600"/>
-              </a:spcAft>
-              <a:defRPr sz="1700">
-                <a:solidFill>
-                  <a:srgbClr val="CCCCCC"/>
-                </a:solidFill>
-                <a:latin typeface="Calibri"/>
-              </a:defRPr>
-            </a:pPr>
-            <a:r>
-              <a:t>   - Components, Pages, Context (state management)</a:t>
-            </a:r>
-          </a:p>
-          <a:p>
-            <a:pPr>
-              <a:spcAft>
-                <a:spcPts val="600"/>
-              </a:spcAft>
-              <a:defRPr sz="1700">
-                <a:solidFill>
-                  <a:srgbClr val="CCCCCC"/>
-                </a:solidFill>
-                <a:latin typeface="Calibri"/>
-              </a:defRPr>
-            </a:pPr>
-          </a:p>
-          <a:p>
-            <a:pPr>
-              <a:spcAft>
-                <a:spcPts val="600"/>
-              </a:spcAft>
-              <a:defRPr sz="1700">
-                <a:solidFill>
-                  <a:srgbClr val="CCCCCC"/>
-                </a:solidFill>
-                <a:latin typeface="Calibri"/>
-              </a:defRPr>
-            </a:pPr>
-            <a:r>
-              <a:t>  Data Layer: Firebase Firestore (Real-time NoSQL)</a:t>
-            </a:r>
-          </a:p>
-          <a:p>
-            <a:pPr>
-              <a:spcAft>
-                <a:spcPts val="600"/>
-              </a:spcAft>
-              <a:defRPr sz="1700">
-                <a:solidFill>
-                  <a:srgbClr val="CCCCCC"/>
-                </a:solidFill>
-                <a:latin typeface="Calibri"/>
-              </a:defRPr>
-            </a:pPr>
-            <a:r>
-              <a:t>   - Collections: users, candidates, config</a:t>
+            <a:pPr algn="ctr">
+              <a:defRPr sz="1000" b="0">
+                <a:solidFill>
+                  <a:srgbClr val="FFD700"/>
+                </a:solidFill>
+                <a:latin typeface="Calibri"/>
+              </a:defRPr>
+            </a:pPr>
+            <a:r>
+              <a:t>  Home / Landing Page</a:t>
+            </a:r>
+          </a:p>
+        </p:txBody>
+      </p:sp>
+      <p:pic>
+        <p:nvPicPr>
+          <p:cNvPr id="7" name="Picture 6" descr="ss_02_who_are_you.png"/>
+          <p:cNvPicPr>
+            <a:picLocks noChangeAspect="1"/>
+          </p:cNvPicPr>
+          <p:nvPr/>
+        </p:nvPicPr>
+        <p:blipFill>
+          <a:blip r:embed="rId3"/>
+          <a:stretch>
+            <a:fillRect/>
+          </a:stretch>
+        </p:blipFill>
+        <p:spPr>
+          <a:xfrm>
+            <a:off x="4480560" y="1188720"/>
+            <a:ext cx="3474720" cy="2286000"/>
+          </a:xfrm>
+          <a:prstGeom prst="rect">
+            <a:avLst/>
+          </a:prstGeom>
+        </p:spPr>
+      </p:pic>
+      <p:sp>
+        <p:nvSpPr>
+          <p:cNvPr id="8" name="TextBox 7"/>
+          <p:cNvSpPr txBox="1"/>
+          <p:nvPr/>
+        </p:nvSpPr>
+        <p:spPr>
+          <a:xfrm>
+            <a:off x="4480560" y="3200400"/>
+            <a:ext cx="3474720" cy="274320"/>
+          </a:xfrm>
+          <a:prstGeom prst="rect">
+            <a:avLst/>
+          </a:prstGeom>
+          <a:noFill/>
+        </p:spPr>
+        <p:txBody>
+          <a:bodyPr wrap="square">
+            <a:spAutoFit/>
+          </a:bodyPr>
+          <a:lstStyle/>
+          <a:p>
+            <a:pPr algn="ctr">
+              <a:defRPr sz="1000" b="0">
+                <a:solidFill>
+                  <a:srgbClr val="FFD700"/>
+                </a:solidFill>
+                <a:latin typeface="Calibri"/>
+              </a:defRPr>
+            </a:pPr>
+            <a:r>
+              <a:t>  Who Are You?</a:t>
+            </a:r>
+          </a:p>
+        </p:txBody>
+      </p:sp>
+      <p:pic>
+        <p:nvPicPr>
+          <p:cNvPr id="9" name="Picture 8" descr="ss_03_signup.png"/>
+          <p:cNvPicPr>
+            <a:picLocks noChangeAspect="1"/>
+          </p:cNvPicPr>
+          <p:nvPr/>
+        </p:nvPicPr>
+        <p:blipFill>
+          <a:blip r:embed="rId4"/>
+          <a:stretch>
+            <a:fillRect/>
+          </a:stretch>
+        </p:blipFill>
+        <p:spPr>
+          <a:xfrm>
+            <a:off x="8229600" y="1188720"/>
+            <a:ext cx="3474720" cy="2286000"/>
+          </a:xfrm>
+          <a:prstGeom prst="rect">
+            <a:avLst/>
+          </a:prstGeom>
+        </p:spPr>
+      </p:pic>
+      <p:sp>
+        <p:nvSpPr>
+          <p:cNvPr id="10" name="TextBox 9"/>
+          <p:cNvSpPr txBox="1"/>
+          <p:nvPr/>
+        </p:nvSpPr>
+        <p:spPr>
+          <a:xfrm>
+            <a:off x="8229600" y="3200400"/>
+            <a:ext cx="3474720" cy="274320"/>
+          </a:xfrm>
+          <a:prstGeom prst="rect">
+            <a:avLst/>
+          </a:prstGeom>
+          <a:noFill/>
+        </p:spPr>
+        <p:txBody>
+          <a:bodyPr wrap="square">
+            <a:spAutoFit/>
+          </a:bodyPr>
+          <a:lstStyle/>
+          <a:p>
+            <a:pPr algn="ctr">
+              <a:defRPr sz="1000" b="0">
+                <a:solidFill>
+                  <a:srgbClr val="FFD700"/>
+                </a:solidFill>
+                <a:latin typeface="Calibri"/>
+              </a:defRPr>
+            </a:pPr>
+            <a:r>
+              <a:t>  Sign Up Page</a:t>
+            </a:r>
+          </a:p>
+        </p:txBody>
+      </p:sp>
+      <p:pic>
+        <p:nvPicPr>
+          <p:cNvPr id="11" name="Picture 10" descr="ss_04_signin.png"/>
+          <p:cNvPicPr>
+            <a:picLocks noChangeAspect="1"/>
+          </p:cNvPicPr>
+          <p:nvPr/>
+        </p:nvPicPr>
+        <p:blipFill>
+          <a:blip r:embed="rId5"/>
+          <a:stretch>
+            <a:fillRect/>
+          </a:stretch>
+        </p:blipFill>
+        <p:spPr>
+          <a:xfrm>
+            <a:off x="731520" y="3931920"/>
+            <a:ext cx="3474720" cy="2286000"/>
+          </a:xfrm>
+          <a:prstGeom prst="rect">
+            <a:avLst/>
+          </a:prstGeom>
+        </p:spPr>
+      </p:pic>
+      <p:sp>
+        <p:nvSpPr>
+          <p:cNvPr id="12" name="TextBox 11"/>
+          <p:cNvSpPr txBox="1"/>
+          <p:nvPr/>
+        </p:nvSpPr>
+        <p:spPr>
+          <a:xfrm>
+            <a:off x="731520" y="5943600"/>
+            <a:ext cx="3474720" cy="274320"/>
+          </a:xfrm>
+          <a:prstGeom prst="rect">
+            <a:avLst/>
+          </a:prstGeom>
+          <a:noFill/>
+        </p:spPr>
+        <p:txBody>
+          <a:bodyPr wrap="square">
+            <a:spAutoFit/>
+          </a:bodyPr>
+          <a:lstStyle/>
+          <a:p>
+            <a:pPr algn="ctr">
+              <a:defRPr sz="1000" b="0">
+                <a:solidFill>
+                  <a:srgbClr val="FFD700"/>
+                </a:solidFill>
+                <a:latin typeface="Calibri"/>
+              </a:defRPr>
+            </a:pPr>
+            <a:r>
+              <a:t>  Sign In Page</a:t>
+            </a:r>
+          </a:p>
+        </p:txBody>
+      </p:sp>
+      <p:pic>
+        <p:nvPicPr>
+          <p:cNvPr id="13" name="Picture 12" descr="ss_05_dashboard.png"/>
+          <p:cNvPicPr>
+            <a:picLocks noChangeAspect="1"/>
+          </p:cNvPicPr>
+          <p:nvPr/>
+        </p:nvPicPr>
+        <p:blipFill>
+          <a:blip r:embed="rId6"/>
+          <a:stretch>
+            <a:fillRect/>
+          </a:stretch>
+        </p:blipFill>
+        <p:spPr>
+          <a:xfrm>
+            <a:off x="4480560" y="3931920"/>
+            <a:ext cx="3474720" cy="2286000"/>
+          </a:xfrm>
+          <a:prstGeom prst="rect">
+            <a:avLst/>
+          </a:prstGeom>
+        </p:spPr>
+      </p:pic>
+      <p:sp>
+        <p:nvSpPr>
+          <p:cNvPr id="14" name="TextBox 13"/>
+          <p:cNvSpPr txBox="1"/>
+          <p:nvPr/>
+        </p:nvSpPr>
+        <p:spPr>
+          <a:xfrm>
+            <a:off x="4480560" y="5943600"/>
+            <a:ext cx="3474720" cy="274320"/>
+          </a:xfrm>
+          <a:prstGeom prst="rect">
+            <a:avLst/>
+          </a:prstGeom>
+          <a:noFill/>
+        </p:spPr>
+        <p:txBody>
+          <a:bodyPr wrap="square">
+            <a:spAutoFit/>
+          </a:bodyPr>
+          <a:lstStyle/>
+          <a:p>
+            <a:pPr algn="ctr">
+              <a:defRPr sz="1000" b="0">
+                <a:solidFill>
+                  <a:srgbClr val="FFD700"/>
+                </a:solidFill>
+                <a:latin typeface="Calibri"/>
+              </a:defRPr>
+            </a:pPr>
+            <a:r>
+              <a:t>  Admin Dashboard</a:t>
             </a:r>
           </a:p>
         </p:txBody>
@@ -5807,7 +6937,7 @@
             <a:avLst/>
           </a:prstGeom>
           <a:solidFill>
-            <a:srgbClr val="F97316"/>
+            <a:srgbClr val="FFD700"/>
           </a:solidFill>
           <a:ln>
             <a:noFill/>
@@ -5843,7 +6973,7 @@
         </p:nvSpPr>
         <p:spPr>
           <a:xfrm>
-            <a:off x="731520" y="457200"/>
+            <a:off x="731520" y="365760"/>
             <a:ext cx="10058400" cy="731520"/>
           </a:xfrm>
           <a:prstGeom prst="rect">
@@ -5866,7 +6996,7 @@
               </a:defRPr>
             </a:pPr>
             <a:r>
-              <a:t>USER ROLES &amp; WORKFLOW</a:t>
+              <a:t>SYSTEM ARCHITECTURE</a:t>
             </a:r>
           </a:p>
         </p:txBody>
@@ -5879,14 +7009,14 @@
         </p:nvSpPr>
         <p:spPr>
           <a:xfrm>
-            <a:off x="731520" y="1188720"/>
+            <a:off x="731520" y="1051560"/>
             <a:ext cx="1828800" cy="36576"/>
           </a:xfrm>
           <a:prstGeom prst="roundRect">
             <a:avLst/>
           </a:prstGeom>
           <a:solidFill>
-            <a:srgbClr val="F97316"/>
+            <a:srgbClr val="FFD700"/>
           </a:solidFill>
           <a:ln>
             <a:noFill/>
@@ -5916,100 +7046,14 @@
       </p:sp>
       <p:sp>
         <p:nvSpPr>
-          <p:cNvPr id="5" name="Rounded Rectangle 4"/>
-          <p:cNvSpPr/>
-          <p:nvPr/>
-        </p:nvSpPr>
-        <p:spPr>
-          <a:xfrm>
-            <a:off x="731520" y="1645920"/>
-            <a:ext cx="3474720" cy="2286000"/>
-          </a:xfrm>
-          <a:prstGeom prst="roundRect">
-            <a:avLst/>
-          </a:prstGeom>
-          <a:solidFill>
-            <a:srgbClr val="1A1A2E"/>
-          </a:solidFill>
-          <a:ln>
-            <a:noFill/>
-          </a:ln>
-        </p:spPr>
-        <p:style>
-          <a:lnRef idx="1">
-            <a:schemeClr val="accent1"/>
-          </a:lnRef>
-          <a:fillRef idx="3">
-            <a:schemeClr val="accent1"/>
-          </a:fillRef>
-          <a:effectRef idx="2">
-            <a:schemeClr val="accent1"/>
-          </a:effectRef>
-          <a:fontRef idx="minor">
-            <a:schemeClr val="lt1"/>
-          </a:fontRef>
-        </p:style>
-        <p:txBody>
-          <a:bodyPr rtlCol="0" anchor="ctr"/>
-          <a:lstStyle/>
-          <a:p>
-            <a:pPr algn="ctr"/>
-          </a:p>
-        </p:txBody>
-      </p:sp>
-      <p:sp>
-        <p:nvSpPr>
-          <p:cNvPr id="6" name="Rounded Rectangle 5"/>
-          <p:cNvSpPr/>
-          <p:nvPr/>
-        </p:nvSpPr>
-        <p:spPr>
-          <a:xfrm>
-            <a:off x="731520" y="1645920"/>
-            <a:ext cx="3474720" cy="50800"/>
-          </a:xfrm>
-          <a:prstGeom prst="roundRect">
-            <a:avLst/>
-          </a:prstGeom>
-          <a:solidFill>
-            <a:srgbClr val="22C55E"/>
-          </a:solidFill>
-          <a:ln>
-            <a:noFill/>
-          </a:ln>
-        </p:spPr>
-        <p:style>
-          <a:lnRef idx="1">
-            <a:schemeClr val="accent1"/>
-          </a:lnRef>
-          <a:fillRef idx="3">
-            <a:schemeClr val="accent1"/>
-          </a:fillRef>
-          <a:effectRef idx="2">
-            <a:schemeClr val="accent1"/>
-          </a:effectRef>
-          <a:fontRef idx="minor">
-            <a:schemeClr val="lt1"/>
-          </a:fontRef>
-        </p:style>
-        <p:txBody>
-          <a:bodyPr rtlCol="0" anchor="ctr"/>
-          <a:lstStyle/>
-          <a:p>
-            <a:pPr algn="ctr"/>
-          </a:p>
-        </p:txBody>
-      </p:sp>
-      <p:sp>
-        <p:nvSpPr>
-          <p:cNvPr id="7" name="TextBox 6"/>
+          <p:cNvPr id="5" name="TextBox 4"/>
           <p:cNvSpPr txBox="1"/>
           <p:nvPr/>
         </p:nvSpPr>
         <p:spPr>
           <a:xfrm>
-            <a:off x="1005840" y="1920240"/>
-            <a:ext cx="2926080" cy="457200"/>
+            <a:off x="731520" y="1463040"/>
+            <a:ext cx="10058400" cy="5029200"/>
           </a:xfrm>
           <a:prstGeom prst="rect">
             <a:avLst/>
@@ -6022,476 +7066,163 @@
           </a:bodyPr>
           <a:lstStyle/>
           <a:p>
-            <a:pPr algn="l">
-              <a:defRPr sz="1800" b="1">
-                <a:solidFill>
-                  <a:srgbClr val="22C55E"/>
-                </a:solidFill>
-                <a:latin typeface="Calibri"/>
-              </a:defRPr>
-            </a:pPr>
-            <a:r>
-              <a:t>VOTER FLOW</a:t>
-            </a:r>
-          </a:p>
-        </p:txBody>
-      </p:sp>
-      <p:sp>
-        <p:nvSpPr>
-          <p:cNvPr id="8" name="TextBox 7"/>
-          <p:cNvSpPr txBox="1"/>
-          <p:nvPr/>
-        </p:nvSpPr>
-        <p:spPr>
-          <a:xfrm>
-            <a:off x="1005840" y="2468880"/>
-            <a:ext cx="2926080" cy="1188720"/>
-          </a:xfrm>
-          <a:prstGeom prst="rect">
-            <a:avLst/>
-          </a:prstGeom>
-          <a:noFill/>
-        </p:spPr>
-        <p:txBody>
-          <a:bodyPr wrap="square">
-            <a:spAutoFit/>
-          </a:bodyPr>
-          <a:lstStyle/>
-          <a:p>
-            <a:pPr algn="l">
-              <a:defRPr sz="1400" b="0">
-                <a:solidFill>
-                  <a:srgbClr val="CCCCCC"/>
-                </a:solidFill>
-                <a:latin typeface="Calibri"/>
-              </a:defRPr>
-            </a:pPr>
-            <a:r>
-              <a:t>Register  Sign In</a:t>
-            </a:r>
-            <a:br/>
-            <a:r>
-              <a:t> View Candidates</a:t>
-            </a:r>
-            <a:br/>
-            <a:r>
-              <a:t> Cast Vote</a:t>
-            </a:r>
-            <a:br/>
-            <a:r>
-              <a:t> See Results</a:t>
-            </a:r>
-          </a:p>
-        </p:txBody>
-      </p:sp>
-      <p:sp>
-        <p:nvSpPr>
-          <p:cNvPr id="9" name="Rounded Rectangle 8"/>
-          <p:cNvSpPr/>
-          <p:nvPr/>
-        </p:nvSpPr>
-        <p:spPr>
-          <a:xfrm>
-            <a:off x="4480560" y="1645920"/>
-            <a:ext cx="3474720" cy="2286000"/>
-          </a:xfrm>
-          <a:prstGeom prst="roundRect">
-            <a:avLst/>
-          </a:prstGeom>
-          <a:solidFill>
-            <a:srgbClr val="1A1A2E"/>
-          </a:solidFill>
-          <a:ln>
-            <a:noFill/>
-          </a:ln>
-        </p:spPr>
-        <p:style>
-          <a:lnRef idx="1">
-            <a:schemeClr val="accent1"/>
-          </a:lnRef>
-          <a:fillRef idx="3">
-            <a:schemeClr val="accent1"/>
-          </a:fillRef>
-          <a:effectRef idx="2">
-            <a:schemeClr val="accent1"/>
-          </a:effectRef>
-          <a:fontRef idx="minor">
-            <a:schemeClr val="lt1"/>
-          </a:fontRef>
-        </p:style>
-        <p:txBody>
-          <a:bodyPr rtlCol="0" anchor="ctr"/>
-          <a:lstStyle/>
-          <a:p>
-            <a:pPr algn="ctr"/>
-          </a:p>
-        </p:txBody>
-      </p:sp>
-      <p:sp>
-        <p:nvSpPr>
-          <p:cNvPr id="10" name="Rounded Rectangle 9"/>
-          <p:cNvSpPr/>
-          <p:nvPr/>
-        </p:nvSpPr>
-        <p:spPr>
-          <a:xfrm>
-            <a:off x="4480560" y="1645920"/>
-            <a:ext cx="3474720" cy="50800"/>
-          </a:xfrm>
-          <a:prstGeom prst="roundRect">
-            <a:avLst/>
-          </a:prstGeom>
-          <a:solidFill>
-            <a:srgbClr val="06B6D4"/>
-          </a:solidFill>
-          <a:ln>
-            <a:noFill/>
-          </a:ln>
-        </p:spPr>
-        <p:style>
-          <a:lnRef idx="1">
-            <a:schemeClr val="accent1"/>
-          </a:lnRef>
-          <a:fillRef idx="3">
-            <a:schemeClr val="accent1"/>
-          </a:fillRef>
-          <a:effectRef idx="2">
-            <a:schemeClr val="accent1"/>
-          </a:effectRef>
-          <a:fontRef idx="minor">
-            <a:schemeClr val="lt1"/>
-          </a:fontRef>
-        </p:style>
-        <p:txBody>
-          <a:bodyPr rtlCol="0" anchor="ctr"/>
-          <a:lstStyle/>
-          <a:p>
-            <a:pPr algn="ctr"/>
-          </a:p>
-        </p:txBody>
-      </p:sp>
-      <p:sp>
-        <p:nvSpPr>
-          <p:cNvPr id="11" name="TextBox 10"/>
-          <p:cNvSpPr txBox="1"/>
-          <p:nvPr/>
-        </p:nvSpPr>
-        <p:spPr>
-          <a:xfrm>
-            <a:off x="4754880" y="1920240"/>
-            <a:ext cx="2926080" cy="457200"/>
-          </a:xfrm>
-          <a:prstGeom prst="rect">
-            <a:avLst/>
-          </a:prstGeom>
-          <a:noFill/>
-        </p:spPr>
-        <p:txBody>
-          <a:bodyPr wrap="square">
-            <a:spAutoFit/>
-          </a:bodyPr>
-          <a:lstStyle/>
-          <a:p>
-            <a:pPr algn="l">
-              <a:defRPr sz="1800" b="1">
-                <a:solidFill>
-                  <a:srgbClr val="06B6D4"/>
-                </a:solidFill>
-                <a:latin typeface="Calibri"/>
-              </a:defRPr>
-            </a:pPr>
-            <a:r>
-              <a:t>CANDIDATE FLOW</a:t>
-            </a:r>
-          </a:p>
-        </p:txBody>
-      </p:sp>
-      <p:sp>
-        <p:nvSpPr>
-          <p:cNvPr id="12" name="TextBox 11"/>
-          <p:cNvSpPr txBox="1"/>
-          <p:nvPr/>
-        </p:nvSpPr>
-        <p:spPr>
-          <a:xfrm>
-            <a:off x="4754880" y="2468880"/>
-            <a:ext cx="2926080" cy="1188720"/>
-          </a:xfrm>
-          <a:prstGeom prst="rect">
-            <a:avLst/>
-          </a:prstGeom>
-          <a:noFill/>
-        </p:spPr>
-        <p:txBody>
-          <a:bodyPr wrap="square">
-            <a:spAutoFit/>
-          </a:bodyPr>
-          <a:lstStyle/>
-          <a:p>
-            <a:pPr algn="l">
-              <a:defRPr sz="1400" b="0">
-                <a:solidFill>
-                  <a:srgbClr val="CCCCCC"/>
-                </a:solidFill>
-                <a:latin typeface="Calibri"/>
-              </a:defRPr>
-            </a:pPr>
-            <a:r>
-              <a:t>Register  Apply</a:t>
-            </a:r>
-            <a:br/>
-            <a:r>
-              <a:t> Get Approved</a:t>
-            </a:r>
-            <a:br/>
-            <a:r>
-              <a:t> Submit Manifesto</a:t>
-            </a:r>
-            <a:br/>
-            <a:r>
-              <a:t> Track Rankings</a:t>
-            </a:r>
-          </a:p>
-        </p:txBody>
-      </p:sp>
-      <p:sp>
-        <p:nvSpPr>
-          <p:cNvPr id="13" name="Rounded Rectangle 12"/>
-          <p:cNvSpPr/>
-          <p:nvPr/>
-        </p:nvSpPr>
-        <p:spPr>
-          <a:xfrm>
-            <a:off x="8229600" y="1645920"/>
-            <a:ext cx="3474720" cy="2286000"/>
-          </a:xfrm>
-          <a:prstGeom prst="roundRect">
-            <a:avLst/>
-          </a:prstGeom>
-          <a:solidFill>
-            <a:srgbClr val="1A1A2E"/>
-          </a:solidFill>
-          <a:ln>
-            <a:noFill/>
-          </a:ln>
-        </p:spPr>
-        <p:style>
-          <a:lnRef idx="1">
-            <a:schemeClr val="accent1"/>
-          </a:lnRef>
-          <a:fillRef idx="3">
-            <a:schemeClr val="accent1"/>
-          </a:fillRef>
-          <a:effectRef idx="2">
-            <a:schemeClr val="accent1"/>
-          </a:effectRef>
-          <a:fontRef idx="minor">
-            <a:schemeClr val="lt1"/>
-          </a:fontRef>
-        </p:style>
-        <p:txBody>
-          <a:bodyPr rtlCol="0" anchor="ctr"/>
-          <a:lstStyle/>
-          <a:p>
-            <a:pPr algn="ctr"/>
-          </a:p>
-        </p:txBody>
-      </p:sp>
-      <p:sp>
-        <p:nvSpPr>
-          <p:cNvPr id="14" name="Rounded Rectangle 13"/>
-          <p:cNvSpPr/>
-          <p:nvPr/>
-        </p:nvSpPr>
-        <p:spPr>
-          <a:xfrm>
-            <a:off x="8229600" y="1645920"/>
-            <a:ext cx="3474720" cy="50800"/>
-          </a:xfrm>
-          <a:prstGeom prst="roundRect">
-            <a:avLst/>
-          </a:prstGeom>
-          <a:solidFill>
-            <a:srgbClr val="F97316"/>
-          </a:solidFill>
-          <a:ln>
-            <a:noFill/>
-          </a:ln>
-        </p:spPr>
-        <p:style>
-          <a:lnRef idx="1">
-            <a:schemeClr val="accent1"/>
-          </a:lnRef>
-          <a:fillRef idx="3">
-            <a:schemeClr val="accent1"/>
-          </a:fillRef>
-          <a:effectRef idx="2">
-            <a:schemeClr val="accent1"/>
-          </a:effectRef>
-          <a:fontRef idx="minor">
-            <a:schemeClr val="lt1"/>
-          </a:fontRef>
-        </p:style>
-        <p:txBody>
-          <a:bodyPr rtlCol="0" anchor="ctr"/>
-          <a:lstStyle/>
-          <a:p>
-            <a:pPr algn="ctr"/>
-          </a:p>
-        </p:txBody>
-      </p:sp>
-      <p:sp>
-        <p:nvSpPr>
-          <p:cNvPr id="15" name="TextBox 14"/>
-          <p:cNvSpPr txBox="1"/>
-          <p:nvPr/>
-        </p:nvSpPr>
-        <p:spPr>
-          <a:xfrm>
-            <a:off x="8503920" y="1920240"/>
-            <a:ext cx="2926080" cy="457200"/>
-          </a:xfrm>
-          <a:prstGeom prst="rect">
-            <a:avLst/>
-          </a:prstGeom>
-          <a:noFill/>
-        </p:spPr>
-        <p:txBody>
-          <a:bodyPr wrap="square">
-            <a:spAutoFit/>
-          </a:bodyPr>
-          <a:lstStyle/>
-          <a:p>
-            <a:pPr algn="l">
-              <a:defRPr sz="1800" b="1">
-                <a:solidFill>
-                  <a:srgbClr val="F97316"/>
-                </a:solidFill>
-                <a:latin typeface="Calibri"/>
-              </a:defRPr>
-            </a:pPr>
-            <a:r>
-              <a:t>ADMIN FLOW</a:t>
-            </a:r>
-          </a:p>
-        </p:txBody>
-      </p:sp>
-      <p:sp>
-        <p:nvSpPr>
-          <p:cNvPr id="16" name="TextBox 15"/>
-          <p:cNvSpPr txBox="1"/>
-          <p:nvPr/>
-        </p:nvSpPr>
-        <p:spPr>
-          <a:xfrm>
-            <a:off x="8503920" y="2468880"/>
-            <a:ext cx="2926080" cy="1188720"/>
-          </a:xfrm>
-          <a:prstGeom prst="rect">
-            <a:avLst/>
-          </a:prstGeom>
-          <a:noFill/>
-        </p:spPr>
-        <p:txBody>
-          <a:bodyPr wrap="square">
-            <a:spAutoFit/>
-          </a:bodyPr>
-          <a:lstStyle/>
-          <a:p>
-            <a:pPr algn="l">
-              <a:defRPr sz="1400" b="0">
-                <a:solidFill>
-                  <a:srgbClr val="CCCCCC"/>
-                </a:solidFill>
-                <a:latin typeface="Calibri"/>
-              </a:defRPr>
-            </a:pPr>
-            <a:r>
-              <a:t>Sign In (Admin)</a:t>
-            </a:r>
-            <a:br/>
-            <a:r>
-              <a:t> Schedule Election</a:t>
-            </a:r>
-            <a:br/>
-            <a:r>
-              <a:t> Approve Candidates</a:t>
-            </a:r>
-            <a:br/>
-            <a:r>
-              <a:t> Declare Winner</a:t>
-            </a:r>
-          </a:p>
-        </p:txBody>
-      </p:sp>
-      <p:sp>
-        <p:nvSpPr>
-          <p:cNvPr id="17" name="TextBox 16"/>
-          <p:cNvSpPr txBox="1"/>
-          <p:nvPr/>
-        </p:nvSpPr>
-        <p:spPr>
-          <a:xfrm>
-            <a:off x="731520" y="4389120"/>
-            <a:ext cx="10058400" cy="457200"/>
-          </a:xfrm>
-          <a:prstGeom prst="rect">
-            <a:avLst/>
-          </a:prstGeom>
-          <a:noFill/>
-        </p:spPr>
-        <p:txBody>
-          <a:bodyPr wrap="square">
-            <a:spAutoFit/>
-          </a:bodyPr>
-          <a:lstStyle/>
-          <a:p>
-            <a:pPr algn="l">
-              <a:defRPr sz="1800" b="1">
-                <a:solidFill>
-                  <a:srgbClr val="FFFFFF"/>
-                </a:solidFill>
-                <a:latin typeface="Calibri"/>
-              </a:defRPr>
-            </a:pPr>
-            <a:r>
-              <a:t>GLOBAL WORKFLOW:</a:t>
-            </a:r>
-          </a:p>
-        </p:txBody>
-      </p:sp>
-      <p:sp>
-        <p:nvSpPr>
-          <p:cNvPr id="18" name="TextBox 17"/>
-          <p:cNvSpPr txBox="1"/>
-          <p:nvPr/>
-        </p:nvSpPr>
-        <p:spPr>
-          <a:xfrm>
-            <a:off x="731520" y="4937760"/>
-            <a:ext cx="10515600" cy="1371600"/>
-          </a:xfrm>
-          <a:prstGeom prst="rect">
-            <a:avLst/>
-          </a:prstGeom>
-          <a:noFill/>
-        </p:spPr>
-        <p:txBody>
-          <a:bodyPr wrap="square">
-            <a:spAutoFit/>
-          </a:bodyPr>
-          <a:lstStyle/>
-          <a:p>
-            <a:pPr algn="l">
-              <a:defRPr sz="1600" b="0">
-                <a:solidFill>
-                  <a:srgbClr val="FFD700"/>
-                </a:solidFill>
-                <a:latin typeface="Calibri"/>
-              </a:defRPr>
-            </a:pPr>
-            <a:r>
-              <a:t>Sign Up  Sign In  Portal Select  Apply/Vote  Election Day  Vote Casting  Results  Winner Declared</a:t>
+            <a:pPr>
+              <a:spcAft>
+                <a:spcPts val="500"/>
+              </a:spcAft>
+              <a:defRPr sz="1700">
+                <a:solidFill>
+                  <a:srgbClr val="DDDDDD"/>
+                </a:solidFill>
+                <a:latin typeface="Calibri"/>
+              </a:defRPr>
+            </a:pPr>
+            <a:r>
+              <a:t>  1. User Layer:  Voter | Candidate | Admin  (3 distinct dashboards)</a:t>
+            </a:r>
+          </a:p>
+          <a:p>
+            <a:pPr>
+              <a:spcAft>
+                <a:spcPts val="500"/>
+              </a:spcAft>
+              <a:defRPr sz="1700">
+                <a:solidFill>
+                  <a:srgbClr val="DDDDDD"/>
+                </a:solidFill>
+                <a:latin typeface="Calibri"/>
+              </a:defRPr>
+            </a:pPr>
+            <a:r>
+              <a:t>  2. Application Layer:  React SPA (Single Page Application)</a:t>
+            </a:r>
+          </a:p>
+          <a:p>
+            <a:pPr>
+              <a:spcAft>
+                <a:spcPts val="500"/>
+              </a:spcAft>
+              <a:defRPr sz="1700">
+                <a:solidFill>
+                  <a:srgbClr val="DDDDDD"/>
+                </a:solidFill>
+                <a:latin typeface="Calibri"/>
+              </a:defRPr>
+            </a:pPr>
+            <a:r>
+              <a:t>     - Pages: Overview, Auth, Dashboard, Portal Select</a:t>
+            </a:r>
+          </a:p>
+          <a:p>
+            <a:pPr>
+              <a:spcAft>
+                <a:spcPts val="500"/>
+              </a:spcAft>
+              <a:defRPr sz="1700">
+                <a:solidFill>
+                  <a:srgbClr val="DDDDDD"/>
+                </a:solidFill>
+                <a:latin typeface="Calibri"/>
+              </a:defRPr>
+            </a:pPr>
+            <a:r>
+              <a:t>     - Components: Navbar, VoteBg, Theme Switcher</a:t>
+            </a:r>
+          </a:p>
+          <a:p>
+            <a:pPr>
+              <a:spcAft>
+                <a:spcPts val="500"/>
+              </a:spcAft>
+              <a:defRPr sz="1700">
+                <a:solidFill>
+                  <a:srgbClr val="DDDDDD"/>
+                </a:solidFill>
+                <a:latin typeface="Calibri"/>
+              </a:defRPr>
+            </a:pPr>
+            <a:r>
+              <a:t>     - Context: ElectionProvider (global state via useElection)</a:t>
+            </a:r>
+          </a:p>
+          <a:p>
+            <a:pPr>
+              <a:spcAft>
+                <a:spcPts val="500"/>
+              </a:spcAft>
+              <a:defRPr sz="1700">
+                <a:solidFill>
+                  <a:srgbClr val="DDDDDD"/>
+                </a:solidFill>
+                <a:latin typeface="Calibri"/>
+              </a:defRPr>
+            </a:pPr>
+            <a:r>
+              <a:t>  3. Data Layer:  Firebase Firestore (real-time NoSQL)</a:t>
+            </a:r>
+          </a:p>
+          <a:p>
+            <a:pPr>
+              <a:spcAft>
+                <a:spcPts val="500"/>
+              </a:spcAft>
+              <a:defRPr sz="1700">
+                <a:solidFill>
+                  <a:srgbClr val="DDDDDD"/>
+                </a:solidFill>
+                <a:latin typeface="Calibri"/>
+              </a:defRPr>
+            </a:pPr>
+            <a:r>
+              <a:t>     - Collections: users/, candidates/, config/election</a:t>
+            </a:r>
+          </a:p>
+          <a:p>
+            <a:pPr>
+              <a:spcAft>
+                <a:spcPts val="500"/>
+              </a:spcAft>
+              <a:defRPr sz="1700">
+                <a:solidFill>
+                  <a:srgbClr val="DDDDDD"/>
+                </a:solidFill>
+                <a:latin typeface="Calibri"/>
+              </a:defRPr>
+            </a:pPr>
+            <a:r>
+              <a:t>     - Real-time listeners: onSnapshot() for live updates</a:t>
+            </a:r>
+          </a:p>
+          <a:p>
+            <a:pPr>
+              <a:spcAft>
+                <a:spcPts val="500"/>
+              </a:spcAft>
+              <a:defRPr sz="1700">
+                <a:solidFill>
+                  <a:srgbClr val="DDDDDD"/>
+                </a:solidFill>
+                <a:latin typeface="Calibri"/>
+              </a:defRPr>
+            </a:pPr>
+            <a:r>
+              <a:t>  4. Java Console:  Standalone Java SE application</a:t>
+            </a:r>
+          </a:p>
+          <a:p>
+            <a:pPr>
+              <a:spcAft>
+                <a:spcPts val="500"/>
+              </a:spcAft>
+              <a:defRPr sz="1700">
+                <a:solidFill>
+                  <a:srgbClr val="DDDDDD"/>
+                </a:solidFill>
+                <a:latin typeface="Calibri"/>
+              </a:defRPr>
+            </a:pPr>
+            <a:r>
+              <a:t>     - Same logic, terminal-based UI, demonstrates OOP</a:t>
             </a:r>
           </a:p>
         </p:txBody>
@@ -6537,7 +7268,7 @@
             <a:avLst/>
           </a:prstGeom>
           <a:solidFill>
-            <a:srgbClr val="06B6D4"/>
+            <a:srgbClr val="F97316"/>
           </a:solidFill>
           <a:ln>
             <a:noFill/>
@@ -6573,7 +7304,7 @@
         </p:nvSpPr>
         <p:spPr>
           <a:xfrm>
-            <a:off x="731520" y="457200"/>
+            <a:off x="731520" y="365760"/>
             <a:ext cx="10058400" cy="731520"/>
           </a:xfrm>
           <a:prstGeom prst="rect">
@@ -6596,7 +7327,7 @@
               </a:defRPr>
             </a:pPr>
             <a:r>
-              <a:t>DATABASE DESIGN — FIRESTORE</a:t>
+              <a:t>USER ROLES &amp; WORKFLOW</a:t>
             </a:r>
           </a:p>
         </p:txBody>
@@ -6609,8 +7340,260 @@
         </p:nvSpPr>
         <p:spPr>
           <a:xfrm>
-            <a:off x="731520" y="1188720"/>
+            <a:off x="731520" y="1051560"/>
             <a:ext cx="1828800" cy="36576"/>
+          </a:xfrm>
+          <a:prstGeom prst="roundRect">
+            <a:avLst/>
+          </a:prstGeom>
+          <a:solidFill>
+            <a:srgbClr val="F97316"/>
+          </a:solidFill>
+          <a:ln>
+            <a:noFill/>
+          </a:ln>
+        </p:spPr>
+        <p:style>
+          <a:lnRef idx="1">
+            <a:schemeClr val="accent1"/>
+          </a:lnRef>
+          <a:fillRef idx="3">
+            <a:schemeClr val="accent1"/>
+          </a:fillRef>
+          <a:effectRef idx="2">
+            <a:schemeClr val="accent1"/>
+          </a:effectRef>
+          <a:fontRef idx="minor">
+            <a:schemeClr val="lt1"/>
+          </a:fontRef>
+        </p:style>
+        <p:txBody>
+          <a:bodyPr rtlCol="0" anchor="ctr"/>
+          <a:lstStyle/>
+          <a:p>
+            <a:pPr algn="ctr"/>
+          </a:p>
+        </p:txBody>
+      </p:sp>
+      <p:sp>
+        <p:nvSpPr>
+          <p:cNvPr id="5" name="Rounded Rectangle 4"/>
+          <p:cNvSpPr/>
+          <p:nvPr/>
+        </p:nvSpPr>
+        <p:spPr>
+          <a:xfrm>
+            <a:off x="731520" y="1463040"/>
+            <a:ext cx="3474720" cy="2103120"/>
+          </a:xfrm>
+          <a:prstGeom prst="roundRect">
+            <a:avLst/>
+          </a:prstGeom>
+          <a:solidFill>
+            <a:srgbClr val="1E1E3A"/>
+          </a:solidFill>
+          <a:ln>
+            <a:noFill/>
+          </a:ln>
+        </p:spPr>
+        <p:style>
+          <a:lnRef idx="1">
+            <a:schemeClr val="accent1"/>
+          </a:lnRef>
+          <a:fillRef idx="3">
+            <a:schemeClr val="accent1"/>
+          </a:fillRef>
+          <a:effectRef idx="2">
+            <a:schemeClr val="accent1"/>
+          </a:effectRef>
+          <a:fontRef idx="minor">
+            <a:schemeClr val="lt1"/>
+          </a:fontRef>
+        </p:style>
+        <p:txBody>
+          <a:bodyPr rtlCol="0" anchor="ctr"/>
+          <a:lstStyle/>
+          <a:p>
+            <a:pPr algn="ctr"/>
+          </a:p>
+        </p:txBody>
+      </p:sp>
+      <p:sp>
+        <p:nvSpPr>
+          <p:cNvPr id="6" name="Rounded Rectangle 5"/>
+          <p:cNvSpPr/>
+          <p:nvPr/>
+        </p:nvSpPr>
+        <p:spPr>
+          <a:xfrm>
+            <a:off x="731520" y="1463040"/>
+            <a:ext cx="3474720" cy="50800"/>
+          </a:xfrm>
+          <a:prstGeom prst="roundRect">
+            <a:avLst/>
+          </a:prstGeom>
+          <a:solidFill>
+            <a:srgbClr val="22C55E"/>
+          </a:solidFill>
+          <a:ln>
+            <a:noFill/>
+          </a:ln>
+        </p:spPr>
+        <p:style>
+          <a:lnRef idx="1">
+            <a:schemeClr val="accent1"/>
+          </a:lnRef>
+          <a:fillRef idx="3">
+            <a:schemeClr val="accent1"/>
+          </a:fillRef>
+          <a:effectRef idx="2">
+            <a:schemeClr val="accent1"/>
+          </a:effectRef>
+          <a:fontRef idx="minor">
+            <a:schemeClr val="lt1"/>
+          </a:fontRef>
+        </p:style>
+        <p:txBody>
+          <a:bodyPr rtlCol="0" anchor="ctr"/>
+          <a:lstStyle/>
+          <a:p>
+            <a:pPr algn="ctr"/>
+          </a:p>
+        </p:txBody>
+      </p:sp>
+      <p:sp>
+        <p:nvSpPr>
+          <p:cNvPr id="7" name="TextBox 6"/>
+          <p:cNvSpPr txBox="1"/>
+          <p:nvPr/>
+        </p:nvSpPr>
+        <p:spPr>
+          <a:xfrm>
+            <a:off x="1005840" y="1691640"/>
+            <a:ext cx="2926080" cy="365760"/>
+          </a:xfrm>
+          <a:prstGeom prst="rect">
+            <a:avLst/>
+          </a:prstGeom>
+          <a:noFill/>
+        </p:spPr>
+        <p:txBody>
+          <a:bodyPr wrap="square">
+            <a:spAutoFit/>
+          </a:bodyPr>
+          <a:lstStyle/>
+          <a:p>
+            <a:pPr algn="l">
+              <a:defRPr sz="1600" b="1">
+                <a:solidFill>
+                  <a:srgbClr val="22C55E"/>
+                </a:solidFill>
+                <a:latin typeface="Calibri"/>
+              </a:defRPr>
+            </a:pPr>
+            <a:r>
+              <a:t>VOTER</a:t>
+            </a:r>
+          </a:p>
+        </p:txBody>
+      </p:sp>
+      <p:sp>
+        <p:nvSpPr>
+          <p:cNvPr id="8" name="TextBox 7"/>
+          <p:cNvSpPr txBox="1"/>
+          <p:nvPr/>
+        </p:nvSpPr>
+        <p:spPr>
+          <a:xfrm>
+            <a:off x="1005840" y="2148840"/>
+            <a:ext cx="2926080" cy="1188720"/>
+          </a:xfrm>
+          <a:prstGeom prst="rect">
+            <a:avLst/>
+          </a:prstGeom>
+          <a:noFill/>
+        </p:spPr>
+        <p:txBody>
+          <a:bodyPr wrap="square">
+            <a:spAutoFit/>
+          </a:bodyPr>
+          <a:lstStyle/>
+          <a:p>
+            <a:pPr algn="l">
+              <a:defRPr sz="1300" b="0">
+                <a:solidFill>
+                  <a:srgbClr val="DDDDDD"/>
+                </a:solidFill>
+                <a:latin typeface="Calibri"/>
+              </a:defRPr>
+            </a:pPr>
+            <a:r>
+              <a:t>Register  Sign In</a:t>
+            </a:r>
+            <a:br/>
+            <a:r>
+              <a:t>View Candidates  Cast Vote</a:t>
+            </a:r>
+            <a:br/>
+            <a:r>
+              <a:t>Track Live Results</a:t>
+            </a:r>
+          </a:p>
+        </p:txBody>
+      </p:sp>
+      <p:sp>
+        <p:nvSpPr>
+          <p:cNvPr id="9" name="Rounded Rectangle 8"/>
+          <p:cNvSpPr/>
+          <p:nvPr/>
+        </p:nvSpPr>
+        <p:spPr>
+          <a:xfrm>
+            <a:off x="4480560" y="1463040"/>
+            <a:ext cx="3474720" cy="2103120"/>
+          </a:xfrm>
+          <a:prstGeom prst="roundRect">
+            <a:avLst/>
+          </a:prstGeom>
+          <a:solidFill>
+            <a:srgbClr val="1E1E3A"/>
+          </a:solidFill>
+          <a:ln>
+            <a:noFill/>
+          </a:ln>
+        </p:spPr>
+        <p:style>
+          <a:lnRef idx="1">
+            <a:schemeClr val="accent1"/>
+          </a:lnRef>
+          <a:fillRef idx="3">
+            <a:schemeClr val="accent1"/>
+          </a:fillRef>
+          <a:effectRef idx="2">
+            <a:schemeClr val="accent1"/>
+          </a:effectRef>
+          <a:fontRef idx="minor">
+            <a:schemeClr val="lt1"/>
+          </a:fontRef>
+        </p:style>
+        <p:txBody>
+          <a:bodyPr rtlCol="0" anchor="ctr"/>
+          <a:lstStyle/>
+          <a:p>
+            <a:pPr algn="ctr"/>
+          </a:p>
+        </p:txBody>
+      </p:sp>
+      <p:sp>
+        <p:nvSpPr>
+          <p:cNvPr id="10" name="Rounded Rectangle 9"/>
+          <p:cNvSpPr/>
+          <p:nvPr/>
+        </p:nvSpPr>
+        <p:spPr>
+          <a:xfrm>
+            <a:off x="4480560" y="1463040"/>
+            <a:ext cx="3474720" cy="50800"/>
           </a:xfrm>
           <a:prstGeom prst="roundRect">
             <a:avLst/>
@@ -6646,14 +7629,14 @@
       </p:sp>
       <p:sp>
         <p:nvSpPr>
-          <p:cNvPr id="5" name="TextBox 4"/>
+          <p:cNvPr id="11" name="TextBox 10"/>
           <p:cNvSpPr txBox="1"/>
           <p:nvPr/>
         </p:nvSpPr>
         <p:spPr>
           <a:xfrm>
-            <a:off x="731520" y="1645920"/>
-            <a:ext cx="10058400" cy="5029200"/>
+            <a:off x="4754880" y="1691640"/>
+            <a:ext cx="2926080" cy="365760"/>
           </a:xfrm>
           <a:prstGeom prst="rect">
             <a:avLst/>
@@ -6666,154 +7649,317 @@
           </a:bodyPr>
           <a:lstStyle/>
           <a:p>
+            <a:pPr algn="l">
+              <a:defRPr sz="1600" b="1">
+                <a:solidFill>
+                  <a:srgbClr val="06B6D4"/>
+                </a:solidFill>
+                <a:latin typeface="Calibri"/>
+              </a:defRPr>
+            </a:pPr>
+            <a:r>
+              <a:t>CANDIDATE</a:t>
+            </a:r>
+          </a:p>
+        </p:txBody>
+      </p:sp>
+      <p:sp>
+        <p:nvSpPr>
+          <p:cNvPr id="12" name="TextBox 11"/>
+          <p:cNvSpPr txBox="1"/>
+          <p:nvPr/>
+        </p:nvSpPr>
+        <p:spPr>
+          <a:xfrm>
+            <a:off x="4754880" y="2148840"/>
+            <a:ext cx="2926080" cy="1188720"/>
+          </a:xfrm>
+          <a:prstGeom prst="rect">
+            <a:avLst/>
+          </a:prstGeom>
+          <a:noFill/>
+        </p:spPr>
+        <p:txBody>
+          <a:bodyPr wrap="square">
+            <a:spAutoFit/>
+          </a:bodyPr>
+          <a:lstStyle/>
+          <a:p>
+            <a:pPr algn="l">
+              <a:defRPr sz="1300" b="0">
+                <a:solidFill>
+                  <a:srgbClr val="DDDDDD"/>
+                </a:solidFill>
+                <a:latin typeface="Calibri"/>
+              </a:defRPr>
+            </a:pPr>
+            <a:r>
+              <a:t>Apply  Get Approved</a:t>
+            </a:r>
+            <a:br/>
+            <a:r>
+              <a:t>Submit Manifesto</a:t>
+            </a:r>
+            <a:br/>
+            <a:r>
+              <a:t>Track Rankings</a:t>
+            </a:r>
+          </a:p>
+        </p:txBody>
+      </p:sp>
+      <p:sp>
+        <p:nvSpPr>
+          <p:cNvPr id="13" name="Rounded Rectangle 12"/>
+          <p:cNvSpPr/>
+          <p:nvPr/>
+        </p:nvSpPr>
+        <p:spPr>
+          <a:xfrm>
+            <a:off x="8229600" y="1463040"/>
+            <a:ext cx="3474720" cy="2103120"/>
+          </a:xfrm>
+          <a:prstGeom prst="roundRect">
+            <a:avLst/>
+          </a:prstGeom>
+          <a:solidFill>
+            <a:srgbClr val="1E1E3A"/>
+          </a:solidFill>
+          <a:ln>
+            <a:noFill/>
+          </a:ln>
+        </p:spPr>
+        <p:style>
+          <a:lnRef idx="1">
+            <a:schemeClr val="accent1"/>
+          </a:lnRef>
+          <a:fillRef idx="3">
+            <a:schemeClr val="accent1"/>
+          </a:fillRef>
+          <a:effectRef idx="2">
+            <a:schemeClr val="accent1"/>
+          </a:effectRef>
+          <a:fontRef idx="minor">
+            <a:schemeClr val="lt1"/>
+          </a:fontRef>
+        </p:style>
+        <p:txBody>
+          <a:bodyPr rtlCol="0" anchor="ctr"/>
+          <a:lstStyle/>
+          <a:p>
+            <a:pPr algn="ctr"/>
+          </a:p>
+        </p:txBody>
+      </p:sp>
+      <p:sp>
+        <p:nvSpPr>
+          <p:cNvPr id="14" name="Rounded Rectangle 13"/>
+          <p:cNvSpPr/>
+          <p:nvPr/>
+        </p:nvSpPr>
+        <p:spPr>
+          <a:xfrm>
+            <a:off x="8229600" y="1463040"/>
+            <a:ext cx="3474720" cy="50800"/>
+          </a:xfrm>
+          <a:prstGeom prst="roundRect">
+            <a:avLst/>
+          </a:prstGeom>
+          <a:solidFill>
+            <a:srgbClr val="F97316"/>
+          </a:solidFill>
+          <a:ln>
+            <a:noFill/>
+          </a:ln>
+        </p:spPr>
+        <p:style>
+          <a:lnRef idx="1">
+            <a:schemeClr val="accent1"/>
+          </a:lnRef>
+          <a:fillRef idx="3">
+            <a:schemeClr val="accent1"/>
+          </a:fillRef>
+          <a:effectRef idx="2">
+            <a:schemeClr val="accent1"/>
+          </a:effectRef>
+          <a:fontRef idx="minor">
+            <a:schemeClr val="lt1"/>
+          </a:fontRef>
+        </p:style>
+        <p:txBody>
+          <a:bodyPr rtlCol="0" anchor="ctr"/>
+          <a:lstStyle/>
+          <a:p>
+            <a:pPr algn="ctr"/>
+          </a:p>
+        </p:txBody>
+      </p:sp>
+      <p:sp>
+        <p:nvSpPr>
+          <p:cNvPr id="15" name="TextBox 14"/>
+          <p:cNvSpPr txBox="1"/>
+          <p:nvPr/>
+        </p:nvSpPr>
+        <p:spPr>
+          <a:xfrm>
+            <a:off x="8503920" y="1691640"/>
+            <a:ext cx="2926080" cy="365760"/>
+          </a:xfrm>
+          <a:prstGeom prst="rect">
+            <a:avLst/>
+          </a:prstGeom>
+          <a:noFill/>
+        </p:spPr>
+        <p:txBody>
+          <a:bodyPr wrap="square">
+            <a:spAutoFit/>
+          </a:bodyPr>
+          <a:lstStyle/>
+          <a:p>
+            <a:pPr algn="l">
+              <a:defRPr sz="1600" b="1">
+                <a:solidFill>
+                  <a:srgbClr val="F97316"/>
+                </a:solidFill>
+                <a:latin typeface="Calibri"/>
+              </a:defRPr>
+            </a:pPr>
+            <a:r>
+              <a:t>ADMIN</a:t>
+            </a:r>
+          </a:p>
+        </p:txBody>
+      </p:sp>
+      <p:sp>
+        <p:nvSpPr>
+          <p:cNvPr id="16" name="TextBox 15"/>
+          <p:cNvSpPr txBox="1"/>
+          <p:nvPr/>
+        </p:nvSpPr>
+        <p:spPr>
+          <a:xfrm>
+            <a:off x="8503920" y="2148840"/>
+            <a:ext cx="2926080" cy="1188720"/>
+          </a:xfrm>
+          <a:prstGeom prst="rect">
+            <a:avLst/>
+          </a:prstGeom>
+          <a:noFill/>
+        </p:spPr>
+        <p:txBody>
+          <a:bodyPr wrap="square">
+            <a:spAutoFit/>
+          </a:bodyPr>
+          <a:lstStyle/>
+          <a:p>
+            <a:pPr algn="l">
+              <a:defRPr sz="1300" b="0">
+                <a:solidFill>
+                  <a:srgbClr val="DDDDDD"/>
+                </a:solidFill>
+                <a:latin typeface="Calibri"/>
+              </a:defRPr>
+            </a:pPr>
+            <a:r>
+              <a:t>Schedule Election</a:t>
+            </a:r>
+            <a:br/>
+            <a:r>
+              <a:t>Approve Candidates</a:t>
+            </a:r>
+            <a:br/>
+            <a:r>
+              <a:t>Manage Config  Reset Data</a:t>
+            </a:r>
+          </a:p>
+        </p:txBody>
+      </p:sp>
+      <p:sp>
+        <p:nvSpPr>
+          <p:cNvPr id="17" name="TextBox 16"/>
+          <p:cNvSpPr txBox="1"/>
+          <p:nvPr/>
+        </p:nvSpPr>
+        <p:spPr>
+          <a:xfrm>
+            <a:off x="731520" y="3931920"/>
+            <a:ext cx="10058400" cy="365760"/>
+          </a:xfrm>
+          <a:prstGeom prst="rect">
+            <a:avLst/>
+          </a:prstGeom>
+          <a:noFill/>
+        </p:spPr>
+        <p:txBody>
+          <a:bodyPr wrap="square">
+            <a:spAutoFit/>
+          </a:bodyPr>
+          <a:lstStyle/>
+          <a:p>
+            <a:pPr algn="l">
+              <a:defRPr sz="1600" b="1">
+                <a:solidFill>
+                  <a:srgbClr val="FFFFFF"/>
+                </a:solidFill>
+                <a:latin typeface="Calibri"/>
+              </a:defRPr>
+            </a:pPr>
+            <a:r>
+              <a:t>END-TO-END WORKFLOW:</a:t>
+            </a:r>
+          </a:p>
+        </p:txBody>
+      </p:sp>
+      <p:sp>
+        <p:nvSpPr>
+          <p:cNvPr id="18" name="TextBox 17"/>
+          <p:cNvSpPr txBox="1"/>
+          <p:nvPr/>
+        </p:nvSpPr>
+        <p:spPr>
+          <a:xfrm>
+            <a:off x="731520" y="4480560"/>
+            <a:ext cx="10515600" cy="1828800"/>
+          </a:xfrm>
+          <a:prstGeom prst="rect">
+            <a:avLst/>
+          </a:prstGeom>
+          <a:noFill/>
+        </p:spPr>
+        <p:txBody>
+          <a:bodyPr wrap="square">
+            <a:spAutoFit/>
+          </a:bodyPr>
+          <a:lstStyle/>
+          <a:p>
             <a:pPr>
               <a:spcAft>
-                <a:spcPts val="600"/>
+                <a:spcPts val="500"/>
               </a:spcAft>
-              <a:defRPr sz="1700">
-                <a:solidFill>
-                  <a:srgbClr val="CCCCCC"/>
-                </a:solidFill>
-                <a:latin typeface="Calibri"/>
-              </a:defRPr>
-            </a:pPr>
-            <a:r>
-              <a:t>  Collection: users/</a:t>
+              <a:defRPr sz="1500">
+                <a:solidFill>
+                  <a:srgbClr val="FFD700"/>
+                </a:solidFill>
+                <a:latin typeface="Calibri"/>
+              </a:defRPr>
+            </a:pPr>
+            <a:r>
+              <a:t>Sign Up / Register → Sign In → Select Portal → Apply or Wait → Election Day</a:t>
             </a:r>
           </a:p>
           <a:p>
             <a:pPr>
               <a:spcAft>
-                <a:spcPts val="600"/>
+                <a:spcPts val="500"/>
               </a:spcAft>
-              <a:defRPr sz="1700">
-                <a:solidFill>
-                  <a:srgbClr val="CCCCCC"/>
-                </a:solidFill>
-                <a:latin typeface="Calibri"/>
-              </a:defRPr>
-            </a:pPr>
-            <a:r>
-              <a:t>   Doc ID: voter1, admin — Fields: id, name, role, hasVoted</a:t>
-            </a:r>
-          </a:p>
-          <a:p>
-            <a:pPr>
-              <a:spcAft>
-                <a:spcPts val="600"/>
-              </a:spcAft>
-              <a:defRPr sz="1700">
-                <a:solidFill>
-                  <a:srgbClr val="CCCCCC"/>
-                </a:solidFill>
-                <a:latin typeface="Calibri"/>
-              </a:defRPr>
-            </a:pPr>
-          </a:p>
-          <a:p>
-            <a:pPr>
-              <a:spcAft>
-                <a:spcPts val="600"/>
-              </a:spcAft>
-              <a:defRPr sz="1700">
-                <a:solidFill>
-                  <a:srgbClr val="CCCCCC"/>
-                </a:solidFill>
-                <a:latin typeface="Calibri"/>
-              </a:defRPr>
-            </a:pPr>
-            <a:r>
-              <a:t>  Collection: candidates/</a:t>
-            </a:r>
-          </a:p>
-          <a:p>
-            <a:pPr>
-              <a:spcAft>
-                <a:spcPts val="600"/>
-              </a:spcAft>
-              <a:defRPr sz="1700">
-                <a:solidFill>
-                  <a:srgbClr val="CCCCCC"/>
-                </a:solidFill>
-                <a:latin typeface="Calibri"/>
-              </a:defRPr>
-            </a:pPr>
-            <a:r>
-              <a:t>   Doc ID: auto — Fields: id, userId, name, posts[], status, votes, manifesto</a:t>
-            </a:r>
-          </a:p>
-          <a:p>
-            <a:pPr>
-              <a:spcAft>
-                <a:spcPts val="600"/>
-              </a:spcAft>
-              <a:defRPr sz="1700">
-                <a:solidFill>
-                  <a:srgbClr val="CCCCCC"/>
-                </a:solidFill>
-                <a:latin typeface="Calibri"/>
-              </a:defRPr>
-            </a:pPr>
-          </a:p>
-          <a:p>
-            <a:pPr>
-              <a:spcAft>
-                <a:spcPts val="600"/>
-              </a:spcAft>
-              <a:defRPr sz="1700">
-                <a:solidFill>
-                  <a:srgbClr val="CCCCCC"/>
-                </a:solidFill>
-                <a:latin typeface="Calibri"/>
-              </a:defRPr>
-            </a:pPr>
-            <a:r>
-              <a:t>  Collection: config/election (single document)</a:t>
-            </a:r>
-          </a:p>
-          <a:p>
-            <a:pPr>
-              <a:spcAft>
-                <a:spcPts val="600"/>
-              </a:spcAft>
-              <a:defRPr sz="1700">
-                <a:solidFill>
-                  <a:srgbClr val="CCCCCC"/>
-                </a:solidFill>
-                <a:latin typeface="Calibri"/>
-              </a:defRPr>
-            </a:pPr>
-            <a:r>
-              <a:t>   Fields: status, date, startTime, endTime, officialWinner, availablePosts[]</a:t>
-            </a:r>
-          </a:p>
-          <a:p>
-            <a:pPr>
-              <a:spcAft>
-                <a:spcPts val="600"/>
-              </a:spcAft>
-              <a:defRPr sz="1700">
-                <a:solidFill>
-                  <a:srgbClr val="CCCCCC"/>
-                </a:solidFill>
-                <a:latin typeface="Calibri"/>
-              </a:defRPr>
-            </a:pPr>
-          </a:p>
-          <a:p>
-            <a:pPr>
-              <a:spcAft>
-                <a:spcPts val="600"/>
-              </a:spcAft>
-              <a:defRPr sz="1700">
-                <a:solidFill>
-                  <a:srgbClr val="CCCCCC"/>
-                </a:solidFill>
-                <a:latin typeface="Calibri"/>
-              </a:defRPr>
-            </a:pPr>
-            <a:r>
-              <a:t>  Security: Read public, Write restricted by role &amp; field validation</a:t>
+              <a:defRPr sz="1500">
+                <a:solidFill>
+                  <a:srgbClr val="FFD700"/>
+                </a:solidFill>
+                <a:latin typeface="Calibri"/>
+              </a:defRPr>
+            </a:pPr>
+            <a:r>
+              <a:t>  → Cast Vote → Real-time Results → Election Ends → Winner Declared → Reset for Next</a:t>
             </a:r>
           </a:p>
         </p:txBody>
@@ -6895,8 +8041,8 @@
         </p:nvSpPr>
         <p:spPr>
           <a:xfrm>
-            <a:off x="731520" y="457200"/>
-            <a:ext cx="10058400" cy="731520"/>
+            <a:off x="731520" y="274320"/>
+            <a:ext cx="10058400" cy="548640"/>
           </a:xfrm>
           <a:prstGeom prst="rect">
             <a:avLst/>
@@ -6910,7 +8056,7 @@
           <a:lstStyle/>
           <a:p>
             <a:pPr algn="l">
-              <a:defRPr sz="3600" b="1">
+              <a:defRPr sz="3200" b="1">
                 <a:solidFill>
                   <a:srgbClr val="FFFFFF"/>
                 </a:solidFill>
@@ -6918,7 +8064,7 @@
               </a:defRPr>
             </a:pPr>
             <a:r>
-              <a:t>KEY FEATURES</a:t>
+              <a:t>JAVA IMPLEMENTATION — CORE CLASSES</a:t>
             </a:r>
           </a:p>
         </p:txBody>
@@ -6931,7 +8077,7 @@
         </p:nvSpPr>
         <p:spPr>
           <a:xfrm>
-            <a:off x="731520" y="1188720"/>
+            <a:off x="731520" y="777240"/>
             <a:ext cx="1828800" cy="36576"/>
           </a:xfrm>
           <a:prstGeom prst="roundRect">
@@ -6968,14 +8114,100 @@
       </p:sp>
       <p:sp>
         <p:nvSpPr>
-          <p:cNvPr id="5" name="TextBox 4"/>
+          <p:cNvPr id="5" name="Rounded Rectangle 4"/>
+          <p:cNvSpPr/>
+          <p:nvPr/>
+        </p:nvSpPr>
+        <p:spPr>
+          <a:xfrm>
+            <a:off x="457200" y="1097280"/>
+            <a:ext cx="5486400" cy="5303520"/>
+          </a:xfrm>
+          <a:prstGeom prst="roundRect">
+            <a:avLst/>
+          </a:prstGeom>
+          <a:solidFill>
+            <a:srgbClr val="0D0D1A"/>
+          </a:solidFill>
+          <a:ln>
+            <a:noFill/>
+          </a:ln>
+        </p:spPr>
+        <p:style>
+          <a:lnRef idx="1">
+            <a:schemeClr val="accent1"/>
+          </a:lnRef>
+          <a:fillRef idx="3">
+            <a:schemeClr val="accent1"/>
+          </a:fillRef>
+          <a:effectRef idx="2">
+            <a:schemeClr val="accent1"/>
+          </a:effectRef>
+          <a:fontRef idx="minor">
+            <a:schemeClr val="lt1"/>
+          </a:fontRef>
+        </p:style>
+        <p:txBody>
+          <a:bodyPr rtlCol="0" anchor="ctr"/>
+          <a:lstStyle/>
+          <a:p>
+            <a:pPr algn="ctr"/>
+          </a:p>
+        </p:txBody>
+      </p:sp>
+      <p:sp>
+        <p:nvSpPr>
+          <p:cNvPr id="6" name="Rounded Rectangle 5"/>
+          <p:cNvSpPr/>
+          <p:nvPr/>
+        </p:nvSpPr>
+        <p:spPr>
+          <a:xfrm>
+            <a:off x="457200" y="1097280"/>
+            <a:ext cx="2743200" cy="254000"/>
+          </a:xfrm>
+          <a:prstGeom prst="roundRect">
+            <a:avLst/>
+          </a:prstGeom>
+          <a:solidFill>
+            <a:srgbClr val="F97316"/>
+          </a:solidFill>
+          <a:ln>
+            <a:noFill/>
+          </a:ln>
+        </p:spPr>
+        <p:style>
+          <a:lnRef idx="1">
+            <a:schemeClr val="accent1"/>
+          </a:lnRef>
+          <a:fillRef idx="3">
+            <a:schemeClr val="accent1"/>
+          </a:fillRef>
+          <a:effectRef idx="2">
+            <a:schemeClr val="accent1"/>
+          </a:effectRef>
+          <a:fontRef idx="minor">
+            <a:schemeClr val="lt1"/>
+          </a:fontRef>
+        </p:style>
+        <p:txBody>
+          <a:bodyPr rtlCol="0" anchor="ctr"/>
+          <a:lstStyle/>
+          <a:p>
+            <a:pPr algn="ctr"/>
+          </a:p>
+        </p:txBody>
+      </p:sp>
+      <p:sp>
+        <p:nvSpPr>
+          <p:cNvPr id="7" name="TextBox 6"/>
           <p:cNvSpPr txBox="1"/>
           <p:nvPr/>
         </p:nvSpPr>
         <p:spPr>
           <a:xfrm>
-            <a:off x="731520" y="1645920"/>
-            <a:ext cx="10058400" cy="5029200"/>
+            <a:off x="731520" y="1143000"/>
+            <a:ext cx="1828800" cy="228600"/>
           </a:xfrm>
           <a:prstGeom prst="rect">
             <a:avLst/>
@@ -6988,147 +8220,350 @@
           </a:bodyPr>
           <a:lstStyle/>
           <a:p>
-            <a:pPr>
-              <a:spcAft>
-                <a:spcPts val="600"/>
-              </a:spcAft>
-              <a:defRPr sz="1700">
-                <a:solidFill>
-                  <a:srgbClr val="CCCCCC"/>
-                </a:solidFill>
-                <a:latin typeface="Calibri"/>
-              </a:defRPr>
-            </a:pPr>
-            <a:r>
-              <a:t>  One Student, One Vote — prevents duplicate voting</a:t>
-            </a:r>
-          </a:p>
-          <a:p>
-            <a:pPr>
-              <a:spcAft>
-                <a:spcPts val="600"/>
-              </a:spcAft>
-              <a:defRPr sz="1700">
-                <a:solidFill>
-                  <a:srgbClr val="CCCCCC"/>
-                </a:solidFill>
-                <a:latin typeface="Calibri"/>
-              </a:defRPr>
-            </a:pPr>
-            <a:r>
-              <a:t>  Per-Post Voting — President, GS, VP with separate rankings</a:t>
-            </a:r>
-          </a:p>
-          <a:p>
-            <a:pPr>
-              <a:spcAft>
-                <a:spcPts val="600"/>
-              </a:spcAft>
-              <a:defRPr sz="1700">
-                <a:solidFill>
-                  <a:srgbClr val="CCCCCC"/>
-                </a:solidFill>
-                <a:latin typeface="Calibri"/>
-              </a:defRPr>
-            </a:pPr>
-            <a:r>
-              <a:t>  Automatic Winner Declaration — per-post and overall</a:t>
-            </a:r>
-          </a:p>
-          <a:p>
-            <a:pPr>
-              <a:spcAft>
-                <a:spcPts val="600"/>
-              </a:spcAft>
-              <a:defRPr sz="1700">
-                <a:solidFill>
-                  <a:srgbClr val="CCCCCC"/>
-                </a:solidFill>
-                <a:latin typeface="Calibri"/>
-              </a:defRPr>
-            </a:pPr>
-            <a:r>
-              <a:t>  Live Result Tracking — real-time vote count updates</a:t>
-            </a:r>
-          </a:p>
-          <a:p>
-            <a:pPr>
-              <a:spcAft>
-                <a:spcPts val="600"/>
-              </a:spcAft>
-              <a:defRPr sz="1700">
-                <a:solidFill>
-                  <a:srgbClr val="CCCCCC"/>
-                </a:solidFill>
-                <a:latin typeface="Calibri"/>
-              </a:defRPr>
-            </a:pPr>
-            <a:r>
-              <a:t>  Dark/Light Theme — user preference toggle</a:t>
-            </a:r>
-          </a:p>
-          <a:p>
-            <a:pPr>
-              <a:spcAft>
-                <a:spcPts val="600"/>
-              </a:spcAft>
-              <a:defRPr sz="1700">
-                <a:solidFill>
-                  <a:srgbClr val="CCCCCC"/>
-                </a:solidFill>
-                <a:latin typeface="Calibri"/>
-              </a:defRPr>
-            </a:pPr>
-            <a:r>
-              <a:t>  Fully Responsive — mobile, tablet, desktop</a:t>
-            </a:r>
-          </a:p>
-          <a:p>
-            <a:pPr>
-              <a:spcAft>
-                <a:spcPts val="600"/>
-              </a:spcAft>
-              <a:defRPr sz="1700">
-                <a:solidFill>
-                  <a:srgbClr val="CCCCCC"/>
-                </a:solidFill>
-                <a:latin typeface="Calibri"/>
-              </a:defRPr>
-            </a:pPr>
-            <a:r>
-              <a:t>  Admin-Only Controls — schedule, approve, reset</a:t>
-            </a:r>
-          </a:p>
-          <a:p>
-            <a:pPr>
-              <a:spcAft>
-                <a:spcPts val="600"/>
-              </a:spcAft>
-              <a:defRPr sz="1700">
-                <a:solidFill>
-                  <a:srgbClr val="CCCCCC"/>
-                </a:solidFill>
-                <a:latin typeface="Calibri"/>
-              </a:defRPr>
-            </a:pPr>
-            <a:r>
-              <a:t>  Candidate Manifesto — voters can read positions</a:t>
-            </a:r>
-          </a:p>
-          <a:p>
-            <a:pPr>
-              <a:spcAft>
-                <a:spcPts val="600"/>
-              </a:spcAft>
-              <a:defRPr sz="1700">
-                <a:solidFill>
-                  <a:srgbClr val="CCCCCC"/>
-                </a:solidFill>
-                <a:latin typeface="Calibri"/>
-              </a:defRPr>
-            </a:pPr>
-            <a:r>
-              <a:t>  Reset All Data — clear everything for new election</a:t>
+            <a:pPr algn="l">
+              <a:defRPr sz="900" b="1">
+                <a:solidFill>
+                  <a:srgbClr val="F97316"/>
+                </a:solidFill>
+                <a:latin typeface="Calibri"/>
+              </a:defRPr>
+            </a:pPr>
+            <a:r>
+              <a:t>  ElectionManager.java</a:t>
+            </a:r>
+          </a:p>
+        </p:txBody>
+      </p:sp>
+      <p:sp>
+        <p:nvSpPr>
+          <p:cNvPr id="8" name="TextBox 7"/>
+          <p:cNvSpPr txBox="1"/>
+          <p:nvPr/>
+        </p:nvSpPr>
+        <p:spPr>
+          <a:xfrm>
+            <a:off x="731520" y="1371600"/>
+            <a:ext cx="4937760" cy="4937760"/>
+          </a:xfrm>
+          <a:prstGeom prst="rect">
+            <a:avLst/>
+          </a:prstGeom>
+          <a:noFill/>
+        </p:spPr>
+        <p:txBody>
+          <a:bodyPr wrap="square">
+            <a:spAutoFit/>
+          </a:bodyPr>
+          <a:lstStyle/>
+          <a:p>
+            <a:pPr algn="l">
+              <a:defRPr sz="900" b="0">
+                <a:solidFill>
+                  <a:srgbClr val="A0FFA0"/>
+                </a:solidFill>
+                <a:latin typeface="Calibri"/>
+              </a:defRPr>
+            </a:pPr>
+            <a:r>
+              <a:t>// ElectionManager.java - Core Logic</a:t>
+            </a:r>
+            <a:br/>
+            <a:r>
+              <a:t>public class ElectionManager {</a:t>
+            </a:r>
+            <a:br/>
+            <a:r>
+              <a:t>    Map&lt;String, User&gt; users = new HashMap&lt;&gt;();</a:t>
+            </a:r>
+            <a:br/>
+            <a:r>
+              <a:t>    List&lt;Candidate&gt; candidates = new ArrayList&lt;&gt;();</a:t>
+            </a:r>
+            <a:br/>
+            <a:r>
+              <a:t>    ElectionStatus status = ElectionStatus.FINISHED;</a:t>
+            </a:r>
+            <a:br/>
+            <a:r>
+              <a:t>    String officialWinner = "";</a:t>
+            </a:r>
+            <a:br/>
+            <a:br/>
+            <a:r>
+              <a:t>    public boolean registerUser(String id, </a:t>
+            </a:r>
+            <a:br/>
+            <a:r>
+              <a:t>          String name, String password) {</a:t>
+            </a:r>
+            <a:br/>
+            <a:r>
+              <a:t>        if (users.containsKey(id)) return false;</a:t>
+            </a:r>
+            <a:br/>
+            <a:r>
+              <a:t>        users.put(id, new User(id, name, password, </a:t>
+            </a:r>
+            <a:br/>
+            <a:r>
+              <a:t>            User.UserRole.VOTER));</a:t>
+            </a:r>
+            <a:br/>
+            <a:r>
+              <a:t>        return true;</a:t>
+            </a:r>
+            <a:br/>
+            <a:r>
+              <a:t>    }</a:t>
+            </a:r>
+            <a:br/>
+            <a:br/>
+            <a:r>
+              <a:t>    public List&lt;Candidate&gt; getRankedCandidates() {</a:t>
+            </a:r>
+            <a:br/>
+            <a:r>
+              <a:t>        return getApprovedCandidates().stream()</a:t>
+            </a:r>
+            <a:br/>
+            <a:r>
+              <a:t>            .sorted((a, b) -&gt; Integer.compare(</a:t>
+            </a:r>
+            <a:br/>
+            <a:r>
+              <a:t>                b.getVotes(), a.getVotes()))</a:t>
+            </a:r>
+            <a:br/>
+            <a:r>
+              <a:t>            .collect(Collectors.toList());</a:t>
+            </a:r>
+            <a:br/>
+            <a:r>
+              <a:t>    }</a:t>
+            </a:r>
+          </a:p>
+        </p:txBody>
+      </p:sp>
+      <p:sp>
+        <p:nvSpPr>
+          <p:cNvPr id="9" name="Rounded Rectangle 8"/>
+          <p:cNvSpPr/>
+          <p:nvPr/>
+        </p:nvSpPr>
+        <p:spPr>
+          <a:xfrm>
+            <a:off x="6217920" y="1097280"/>
+            <a:ext cx="5486400" cy="5303520"/>
+          </a:xfrm>
+          <a:prstGeom prst="roundRect">
+            <a:avLst/>
+          </a:prstGeom>
+          <a:solidFill>
+            <a:srgbClr val="0D0D1A"/>
+          </a:solidFill>
+          <a:ln>
+            <a:noFill/>
+          </a:ln>
+        </p:spPr>
+        <p:style>
+          <a:lnRef idx="1">
+            <a:schemeClr val="accent1"/>
+          </a:lnRef>
+          <a:fillRef idx="3">
+            <a:schemeClr val="accent1"/>
+          </a:fillRef>
+          <a:effectRef idx="2">
+            <a:schemeClr val="accent1"/>
+          </a:effectRef>
+          <a:fontRef idx="minor">
+            <a:schemeClr val="lt1"/>
+          </a:fontRef>
+        </p:style>
+        <p:txBody>
+          <a:bodyPr rtlCol="0" anchor="ctr"/>
+          <a:lstStyle/>
+          <a:p>
+            <a:pPr algn="ctr"/>
+          </a:p>
+        </p:txBody>
+      </p:sp>
+      <p:sp>
+        <p:nvSpPr>
+          <p:cNvPr id="10" name="Rounded Rectangle 9"/>
+          <p:cNvSpPr/>
+          <p:nvPr/>
+        </p:nvSpPr>
+        <p:spPr>
+          <a:xfrm>
+            <a:off x="6217920" y="1097280"/>
+            <a:ext cx="2743200" cy="254000"/>
+          </a:xfrm>
+          <a:prstGeom prst="roundRect">
+            <a:avLst/>
+          </a:prstGeom>
+          <a:solidFill>
+            <a:srgbClr val="F97316"/>
+          </a:solidFill>
+          <a:ln>
+            <a:noFill/>
+          </a:ln>
+        </p:spPr>
+        <p:style>
+          <a:lnRef idx="1">
+            <a:schemeClr val="accent1"/>
+          </a:lnRef>
+          <a:fillRef idx="3">
+            <a:schemeClr val="accent1"/>
+          </a:fillRef>
+          <a:effectRef idx="2">
+            <a:schemeClr val="accent1"/>
+          </a:effectRef>
+          <a:fontRef idx="minor">
+            <a:schemeClr val="lt1"/>
+          </a:fontRef>
+        </p:style>
+        <p:txBody>
+          <a:bodyPr rtlCol="0" anchor="ctr"/>
+          <a:lstStyle/>
+          <a:p>
+            <a:pPr algn="ctr"/>
+          </a:p>
+        </p:txBody>
+      </p:sp>
+      <p:sp>
+        <p:nvSpPr>
+          <p:cNvPr id="11" name="TextBox 10"/>
+          <p:cNvSpPr txBox="1"/>
+          <p:nvPr/>
+        </p:nvSpPr>
+        <p:spPr>
+          <a:xfrm>
+            <a:off x="6492240" y="1143000"/>
+            <a:ext cx="1828800" cy="228600"/>
+          </a:xfrm>
+          <a:prstGeom prst="rect">
+            <a:avLst/>
+          </a:prstGeom>
+          <a:noFill/>
+        </p:spPr>
+        <p:txBody>
+          <a:bodyPr wrap="square">
+            <a:spAutoFit/>
+          </a:bodyPr>
+          <a:lstStyle/>
+          <a:p>
+            <a:pPr algn="l">
+              <a:defRPr sz="900" b="1">
+                <a:solidFill>
+                  <a:srgbClr val="F97316"/>
+                </a:solidFill>
+                <a:latin typeface="Calibri"/>
+              </a:defRPr>
+            </a:pPr>
+            <a:r>
+              <a:t>  Main.java</a:t>
+            </a:r>
+          </a:p>
+        </p:txBody>
+      </p:sp>
+      <p:sp>
+        <p:nvSpPr>
+          <p:cNvPr id="12" name="TextBox 11"/>
+          <p:cNvSpPr txBox="1"/>
+          <p:nvPr/>
+        </p:nvSpPr>
+        <p:spPr>
+          <a:xfrm>
+            <a:off x="6492240" y="1371600"/>
+            <a:ext cx="4937760" cy="4937760"/>
+          </a:xfrm>
+          <a:prstGeom prst="rect">
+            <a:avLst/>
+          </a:prstGeom>
+          <a:noFill/>
+        </p:spPr>
+        <p:txBody>
+          <a:bodyPr wrap="square">
+            <a:spAutoFit/>
+          </a:bodyPr>
+          <a:lstStyle/>
+          <a:p>
+            <a:pPr algn="l">
+              <a:defRPr sz="900" b="0">
+                <a:solidFill>
+                  <a:srgbClr val="A0FFA0"/>
+                </a:solidFill>
+                <a:latin typeface="Calibri"/>
+              </a:defRPr>
+            </a:pPr>
+            <a:r>
+              <a:t>// Main.java - Console Menu</a:t>
+            </a:r>
+            <a:br/>
+            <a:r>
+              <a:t>public static void main(String[] args) {</a:t>
+            </a:r>
+            <a:br/>
+            <a:r>
+              <a:t>    ElectionManager election = new ElectionManager();</a:t>
+            </a:r>
+            <a:br/>
+            <a:r>
+              <a:t>    Scanner scanner = new Scanner(System.in);</a:t>
+            </a:r>
+            <a:br/>
+            <a:r>
+              <a:t>    election.registerUser("admin", </a:t>
+            </a:r>
+            <a:br/>
+            <a:r>
+              <a:t>        "Admin", "admin123");</a:t>
+            </a:r>
+            <a:br/>
+            <a:br/>
+            <a:r>
+              <a:t>    while (true) {</a:t>
+            </a:r>
+            <a:br/>
+            <a:r>
+              <a:t>        System.out.println("1. Register");</a:t>
+            </a:r>
+            <a:br/>
+            <a:r>
+              <a:t>        System.out.println("2. Sign In");</a:t>
+            </a:r>
+            <a:br/>
+            <a:r>
+              <a:t>        System.out.println("3. Apply as Candidate");</a:t>
+            </a:r>
+            <a:br/>
+            <a:r>
+              <a:t>        System.out.println("4. Vote");</a:t>
+            </a:r>
+            <a:br/>
+            <a:r>
+              <a:t>        System.out.println("5. Show Results");</a:t>
+            </a:r>
+            <a:br/>
+            <a:r>
+              <a:t>        System.out.println("0. Exit");</a:t>
+            </a:r>
+            <a:br/>
+            <a:br/>
+            <a:r>
+              <a:t>        String choice = scanner.nextLine();</a:t>
+            </a:r>
+            <a:br/>
+            <a:r>
+              <a:t>        // ... handle each option</a:t>
+            </a:r>
+            <a:br/>
+            <a:r>
+              <a:t>    }</a:t>
+            </a:r>
+            <a:br/>
+            <a:r>
+              <a:t>}</a:t>
             </a:r>
           </a:p>
         </p:txBody>
@@ -7174,7 +8609,7 @@
             <a:avLst/>
           </a:prstGeom>
           <a:solidFill>
-            <a:srgbClr val="F97316"/>
+            <a:srgbClr val="FFD700"/>
           </a:solidFill>
           <a:ln>
             <a:noFill/>
@@ -7210,7 +8645,7 @@
         </p:nvSpPr>
         <p:spPr>
           <a:xfrm>
-            <a:off x="731520" y="457200"/>
+            <a:off x="731520" y="365760"/>
             <a:ext cx="10058400" cy="731520"/>
           </a:xfrm>
           <a:prstGeom prst="rect">
@@ -7233,7 +8668,7 @@
               </a:defRPr>
             </a:pPr>
             <a:r>
-              <a:t>JAVA CONSOLE IMPLEMENTATION</a:t>
+              <a:t>OOP CONCEPTS IN JAVA</a:t>
             </a:r>
           </a:p>
         </p:txBody>
@@ -7246,8 +8681,94 @@
         </p:nvSpPr>
         <p:spPr>
           <a:xfrm>
-            <a:off x="731520" y="1188720"/>
+            <a:off x="731520" y="1051560"/>
             <a:ext cx="1828800" cy="36576"/>
+          </a:xfrm>
+          <a:prstGeom prst="roundRect">
+            <a:avLst/>
+          </a:prstGeom>
+          <a:solidFill>
+            <a:srgbClr val="FFD700"/>
+          </a:solidFill>
+          <a:ln>
+            <a:noFill/>
+          </a:ln>
+        </p:spPr>
+        <p:style>
+          <a:lnRef idx="1">
+            <a:schemeClr val="accent1"/>
+          </a:lnRef>
+          <a:fillRef idx="3">
+            <a:schemeClr val="accent1"/>
+          </a:fillRef>
+          <a:effectRef idx="2">
+            <a:schemeClr val="accent1"/>
+          </a:effectRef>
+          <a:fontRef idx="minor">
+            <a:schemeClr val="lt1"/>
+          </a:fontRef>
+        </p:style>
+        <p:txBody>
+          <a:bodyPr rtlCol="0" anchor="ctr"/>
+          <a:lstStyle/>
+          <a:p>
+            <a:pPr algn="ctr"/>
+          </a:p>
+        </p:txBody>
+      </p:sp>
+      <p:sp>
+        <p:nvSpPr>
+          <p:cNvPr id="5" name="Rounded Rectangle 4"/>
+          <p:cNvSpPr/>
+          <p:nvPr/>
+        </p:nvSpPr>
+        <p:spPr>
+          <a:xfrm>
+            <a:off x="457200" y="1371600"/>
+            <a:ext cx="11247120" cy="5029200"/>
+          </a:xfrm>
+          <a:prstGeom prst="roundRect">
+            <a:avLst/>
+          </a:prstGeom>
+          <a:solidFill>
+            <a:srgbClr val="0D0D1A"/>
+          </a:solidFill>
+          <a:ln>
+            <a:noFill/>
+          </a:ln>
+        </p:spPr>
+        <p:style>
+          <a:lnRef idx="1">
+            <a:schemeClr val="accent1"/>
+          </a:lnRef>
+          <a:fillRef idx="3">
+            <a:schemeClr val="accent1"/>
+          </a:fillRef>
+          <a:effectRef idx="2">
+            <a:schemeClr val="accent1"/>
+          </a:effectRef>
+          <a:fontRef idx="minor">
+            <a:schemeClr val="lt1"/>
+          </a:fontRef>
+        </p:style>
+        <p:txBody>
+          <a:bodyPr rtlCol="0" anchor="ctr"/>
+          <a:lstStyle/>
+          <a:p>
+            <a:pPr algn="ctr"/>
+          </a:p>
+        </p:txBody>
+      </p:sp>
+      <p:sp>
+        <p:nvSpPr>
+          <p:cNvPr id="6" name="Rounded Rectangle 5"/>
+          <p:cNvSpPr/>
+          <p:nvPr/>
+        </p:nvSpPr>
+        <p:spPr>
+          <a:xfrm>
+            <a:off x="457200" y="1371600"/>
+            <a:ext cx="2743200" cy="254000"/>
           </a:xfrm>
           <a:prstGeom prst="roundRect">
             <a:avLst/>
@@ -7283,14 +8804,14 @@
       </p:sp>
       <p:sp>
         <p:nvSpPr>
-          <p:cNvPr id="5" name="TextBox 4"/>
+          <p:cNvPr id="7" name="TextBox 6"/>
           <p:cNvSpPr txBox="1"/>
           <p:nvPr/>
         </p:nvSpPr>
         <p:spPr>
           <a:xfrm>
-            <a:off x="731520" y="1645920"/>
-            <a:ext cx="10058400" cy="5029200"/>
+            <a:off x="731520" y="1417320"/>
+            <a:ext cx="1828800" cy="228600"/>
           </a:xfrm>
           <a:prstGeom prst="rect">
             <a:avLst/>
@@ -7303,199 +8824,136 @@
           </a:bodyPr>
           <a:lstStyle/>
           <a:p>
-            <a:pPr>
-              <a:spcAft>
-                <a:spcPts val="600"/>
-              </a:spcAft>
-              <a:defRPr sz="1600">
-                <a:solidFill>
-                  <a:srgbClr val="CCCCCC"/>
-                </a:solidFill>
-                <a:latin typeface="Calibri"/>
-              </a:defRPr>
-            </a:pPr>
-            <a:r>
-              <a:t>  Package: election (4 classes, ~400 lines of code)</a:t>
-            </a:r>
-          </a:p>
-          <a:p>
-            <a:pPr>
-              <a:spcAft>
-                <a:spcPts val="600"/>
-              </a:spcAft>
-              <a:defRPr sz="1600">
-                <a:solidFill>
-                  <a:srgbClr val="CCCCCC"/>
-                </a:solidFill>
-                <a:latin typeface="Calibri"/>
-              </a:defRPr>
-            </a:pPr>
-          </a:p>
-          <a:p>
-            <a:pPr>
-              <a:spcAft>
-                <a:spcPts val="600"/>
-              </a:spcAft>
-              <a:defRPr sz="1600">
-                <a:solidFill>
-                  <a:srgbClr val="CCCCCC"/>
-                </a:solidFill>
-                <a:latin typeface="Calibri"/>
-              </a:defRPr>
-            </a:pPr>
-            <a:r>
-              <a:t>  User.java — Model with UserRole enum (ADMIN/VOTER/CANDIDATE)</a:t>
-            </a:r>
-          </a:p>
-          <a:p>
-            <a:pPr>
-              <a:spcAft>
-                <a:spcPts val="600"/>
-              </a:spcAft>
-              <a:defRPr sz="1600">
-                <a:solidFill>
-                  <a:srgbClr val="CCCCCC"/>
-                </a:solidFill>
-                <a:latin typeface="Calibri"/>
-              </a:defRPr>
-            </a:pPr>
-            <a:r>
-              <a:t>  Candidate.java — Model with CandidateStatus (PENDING/APPROVED/REJECTED)</a:t>
-            </a:r>
-          </a:p>
-          <a:p>
-            <a:pPr>
-              <a:spcAft>
-                <a:spcPts val="600"/>
-              </a:spcAft>
-              <a:defRPr sz="1600">
-                <a:solidFill>
-                  <a:srgbClr val="CCCCCC"/>
-                </a:solidFill>
-                <a:latin typeface="Calibri"/>
-              </a:defRPr>
-            </a:pPr>
-          </a:p>
-          <a:p>
-            <a:pPr>
-              <a:spcAft>
-                <a:spcPts val="600"/>
-              </a:spcAft>
-              <a:defRPr sz="1600">
-                <a:solidFill>
-                  <a:srgbClr val="CCCCCC"/>
-                </a:solidFill>
-                <a:latin typeface="Calibri"/>
-              </a:defRPr>
-            </a:pPr>
-            <a:r>
-              <a:t>  ElectionManager.java — Core business logic</a:t>
-            </a:r>
-          </a:p>
-          <a:p>
-            <a:pPr>
-              <a:spcAft>
-                <a:spcPts val="600"/>
-              </a:spcAft>
-              <a:defRPr sz="1600">
-                <a:solidFill>
-                  <a:srgbClr val="CCCCCC"/>
-                </a:solidFill>
-                <a:latin typeface="Calibri"/>
-              </a:defRPr>
-            </a:pPr>
-            <a:r>
-              <a:t>   - Registration, Authentication, Candidate Management</a:t>
-            </a:r>
-          </a:p>
-          <a:p>
-            <a:pPr>
-              <a:spcAft>
-                <a:spcPts val="600"/>
-              </a:spcAft>
-              <a:defRPr sz="1600">
-                <a:solidFill>
-                  <a:srgbClr val="CCCCCC"/>
-                </a:solidFill>
-                <a:latin typeface="Calibri"/>
-              </a:defRPr>
-            </a:pPr>
-            <a:r>
-              <a:t>   - Vote Casting, Results, Winner Declaration</a:t>
-            </a:r>
-          </a:p>
-          <a:p>
-            <a:pPr>
-              <a:spcAft>
-                <a:spcPts val="600"/>
-              </a:spcAft>
-              <a:defRPr sz="1600">
-                <a:solidFill>
-                  <a:srgbClr val="CCCCCC"/>
-                </a:solidFill>
-                <a:latin typeface="Calibri"/>
-              </a:defRPr>
-            </a:pPr>
-            <a:r>
-              <a:t>   - Reset All Data (deletes all users)</a:t>
-            </a:r>
-          </a:p>
-          <a:p>
-            <a:pPr>
-              <a:spcAft>
-                <a:spcPts val="600"/>
-              </a:spcAft>
-              <a:defRPr sz="1600">
-                <a:solidFill>
-                  <a:srgbClr val="CCCCCC"/>
-                </a:solidFill>
-                <a:latin typeface="Calibri"/>
-              </a:defRPr>
-            </a:pPr>
-          </a:p>
-          <a:p>
-            <a:pPr>
-              <a:spcAft>
-                <a:spcPts val="600"/>
-              </a:spcAft>
-              <a:defRPr sz="1600">
-                <a:solidFill>
-                  <a:srgbClr val="CCCCCC"/>
-                </a:solidFill>
-                <a:latin typeface="Calibri"/>
-              </a:defRPr>
-            </a:pPr>
-            <a:r>
-              <a:t>  Main.java — Console menu-driven UI (Scanner I/O)</a:t>
-            </a:r>
-          </a:p>
-          <a:p>
-            <a:pPr>
-              <a:spcAft>
-                <a:spcPts val="600"/>
-              </a:spcAft>
-              <a:defRPr sz="1600">
-                <a:solidFill>
-                  <a:srgbClr val="CCCCCC"/>
-                </a:solidFill>
-                <a:latin typeface="Calibri"/>
-              </a:defRPr>
-            </a:pPr>
-          </a:p>
-          <a:p>
-            <a:pPr>
-              <a:spcAft>
-                <a:spcPts val="600"/>
-              </a:spcAft>
-              <a:defRPr sz="1600">
-                <a:solidFill>
-                  <a:srgbClr val="CCCCCC"/>
-                </a:solidFill>
-                <a:latin typeface="Calibri"/>
-              </a:defRPr>
-            </a:pPr>
-            <a:r>
-              <a:t>  Key: HashMap&lt;String,User&gt;, List&lt;Candidate&gt;, Stream API, OOP</a:t>
+            <a:pPr algn="l">
+              <a:defRPr sz="900" b="1">
+                <a:solidFill>
+                  <a:srgbClr val="F97316"/>
+                </a:solidFill>
+                <a:latin typeface="Calibri"/>
+              </a:defRPr>
+            </a:pPr>
+            <a:r>
+              <a:t>  OOP Examples</a:t>
+            </a:r>
+          </a:p>
+        </p:txBody>
+      </p:sp>
+      <p:sp>
+        <p:nvSpPr>
+          <p:cNvPr id="8" name="TextBox 7"/>
+          <p:cNvSpPr txBox="1"/>
+          <p:nvPr/>
+        </p:nvSpPr>
+        <p:spPr>
+          <a:xfrm>
+            <a:off x="731520" y="1645920"/>
+            <a:ext cx="10698480" cy="4663440"/>
+          </a:xfrm>
+          <a:prstGeom prst="rect">
+            <a:avLst/>
+          </a:prstGeom>
+          <a:noFill/>
+        </p:spPr>
+        <p:txBody>
+          <a:bodyPr wrap="square">
+            <a:spAutoFit/>
+          </a:bodyPr>
+          <a:lstStyle/>
+          <a:p>
+            <a:pPr algn="l">
+              <a:defRPr sz="900" b="0">
+                <a:solidFill>
+                  <a:srgbClr val="A0FFA0"/>
+                </a:solidFill>
+                <a:latin typeface="Calibri"/>
+              </a:defRPr>
+            </a:pPr>
+            <a:r>
+              <a:t>// ENCAPSULATION</a:t>
+            </a:r>
+            <a:br/>
+            <a:r>
+              <a:t>public class User {</a:t>
+            </a:r>
+            <a:br/>
+            <a:r>
+              <a:t>    private String id;</a:t>
+            </a:r>
+            <a:br/>
+            <a:r>
+              <a:t>    private String name;</a:t>
+            </a:r>
+            <a:br/>
+            <a:r>
+              <a:t>    private UserRole role;</a:t>
+            </a:r>
+            <a:br/>
+            <a:r>
+              <a:t>    private boolean hasVoted;</a:t>
+            </a:r>
+            <a:br/>
+            <a:br/>
+            <a:r>
+              <a:t>    public String getId() { return id; }</a:t>
+            </a:r>
+            <a:br/>
+            <a:r>
+              <a:t>    public String getName() { return name; }</a:t>
+            </a:r>
+            <a:br/>
+            <a:r>
+              <a:t>    public UserRole getRole() { return role; }</a:t>
+            </a:r>
+            <a:br/>
+            <a:r>
+              <a:t>}</a:t>
+            </a:r>
+            <a:br/>
+            <a:br/>
+            <a:r>
+              <a:t>// POLYMORPHISM (Enum types)</a:t>
+            </a:r>
+            <a:br/>
+            <a:r>
+              <a:t>public enum UserRole { ADMIN, VOTER, CANDIDATE }</a:t>
+            </a:r>
+            <a:br/>
+            <a:r>
+              <a:t>public enum CandidateStatus { PENDING, APPROVED, REJECTED }</a:t>
+            </a:r>
+            <a:br/>
+            <a:br/>
+            <a:r>
+              <a:t>// ABSTRACTION</a:t>
+            </a:r>
+            <a:br/>
+            <a:r>
+              <a:t>// ElectionManager hides 200+ lines</a:t>
+            </a:r>
+            <a:br/>
+            <a:r>
+              <a:t>// of business logic from Main.java</a:t>
+            </a:r>
+            <a:br/>
+            <a:br/>
+            <a:r>
+              <a:t>// COLLECTIONS &amp; STREAMS</a:t>
+            </a:r>
+            <a:br/>
+            <a:r>
+              <a:t>candidates.stream()</a:t>
+            </a:r>
+            <a:br/>
+            <a:r>
+              <a:t>    .filter(c -&gt; c.getStatus() == APPROVED)</a:t>
+            </a:r>
+            <a:br/>
+            <a:r>
+              <a:t>    .sorted((a,b) -&gt; b.getVotes()-a.getVotes())</a:t>
+            </a:r>
+            <a:br/>
+            <a:r>
+              <a:t>    .collect(Collectors.toList());</a:t>
             </a:r>
           </a:p>
         </p:txBody>
